--- a/deliverables/SentinelAI_BMS_Presentation.pptx
+++ b/deliverables/SentinelAI_BMS_Presentation.pptx
@@ -5,16 +5,15 @@
     <p:sldMasterId id="2147483648" r:id="rId1"/>
   </p:sldMasterIdLst>
   <p:notesMasterIdLst>
-    <p:notesMasterId r:id="rId9"/>
+    <p:notesMasterId r:id="rId8"/>
   </p:notesMasterIdLst>
   <p:sldIdLst>
-    <p:sldId id="297" r:id="rId2"/>
-    <p:sldId id="298" r:id="rId3"/>
-    <p:sldId id="281" r:id="rId4"/>
-    <p:sldId id="290" r:id="rId5"/>
-    <p:sldId id="293" r:id="rId6"/>
-    <p:sldId id="299" r:id="rId7"/>
-    <p:sldId id="296" r:id="rId8"/>
+    <p:sldId id="298" r:id="rId2"/>
+    <p:sldId id="281" r:id="rId3"/>
+    <p:sldId id="290" r:id="rId4"/>
+    <p:sldId id="293" r:id="rId5"/>
+    <p:sldId id="299" r:id="rId6"/>
+    <p:sldId id="296" r:id="rId7"/>
   </p:sldIdLst>
   <p:sldSz cx="12192000" cy="6858000"/>
   <p:notesSz cx="6858000" cy="9144000"/>
@@ -262,7 +261,7 @@
             <a:fld id="{C4D5ADD5-2BBC-4A94-8F86-D9013941F742}" type="datetimeFigureOut">
               <a:rPr lang="en-US"/>
               <a:pPr/>
-              <a:t>7/24/2026</a:t>
+              <a:t>7/26/2026</a:t>
             </a:fld>
             <a:endParaRPr lang="en-US"/>
           </a:p>
@@ -599,6 +598,244 @@
       </p:grpSpPr>
       <p:sp>
         <p:nvSpPr>
+          <p:cNvPr id="16385" name="Slide Image Placeholder 1"/>
+          <p:cNvSpPr>
+            <a:spLocks noGrp="1" noRot="1" noChangeAspect="1"/>
+          </p:cNvSpPr>
+          <p:nvPr>
+            <p:ph type="sldImg"/>
+          </p:nvPr>
+        </p:nvSpPr>
+        <p:spPr bwMode="auto">
+          <a:xfrm>
+            <a:off x="381000" y="685800"/>
+            <a:ext cx="6096000" cy="3429000"/>
+          </a:xfrm>
+          <a:noFill/>
+          <a:ln>
+            <a:solidFill>
+              <a:srgbClr val="000000"/>
+            </a:solidFill>
+            <a:miter lim="800000"/>
+            <a:headEnd/>
+            <a:tailEnd/>
+          </a:ln>
+        </p:spPr>
+      </p:sp>
+      <p:sp>
+        <p:nvSpPr>
+          <p:cNvPr id="16386" name="Notes Placeholder 2"/>
+          <p:cNvSpPr>
+            <a:spLocks noGrp="1"/>
+          </p:cNvSpPr>
+          <p:nvPr>
+            <p:ph type="body" idx="1"/>
+          </p:nvPr>
+        </p:nvSpPr>
+        <p:spPr bwMode="auto">
+          <a:noFill/>
+        </p:spPr>
+        <p:txBody>
+          <a:bodyPr wrap="square" numCol="1" anchor="t" anchorCtr="0" compatLnSpc="1">
+            <a:prstTxWarp prst="textNoShape">
+              <a:avLst/>
+            </a:prstTxWarp>
+          </a:bodyPr>
+          <a:lstStyle/>
+          <a:p>
+            <a:pPr eaLnBrk="1" hangingPunct="1">
+              <a:spcBef>
+                <a:spcPct val="0"/>
+              </a:spcBef>
+            </a:pPr>
+            <a:endParaRPr lang="en-US">
+              <a:ea typeface="ＭＳ Ｐゴシック" pitchFamily="1" charset="-128"/>
+            </a:endParaRPr>
+          </a:p>
+        </p:txBody>
+      </p:sp>
+      <p:sp>
+        <p:nvSpPr>
+          <p:cNvPr id="16387" name="Slide Number Placeholder 3"/>
+          <p:cNvSpPr>
+            <a:spLocks noGrp="1"/>
+          </p:cNvSpPr>
+          <p:nvPr>
+            <p:ph type="sldNum" sz="quarter" idx="5"/>
+          </p:nvPr>
+        </p:nvSpPr>
+        <p:spPr bwMode="auto">
+          <a:noFill/>
+          <a:ln>
+            <a:miter lim="800000"/>
+            <a:headEnd/>
+            <a:tailEnd/>
+          </a:ln>
+        </p:spPr>
+        <p:txBody>
+          <a:bodyPr/>
+          <a:lstStyle/>
+          <a:p>
+            <a:fld id="{65F62A7E-A2F8-438F-9CF8-47DE63F471B4}" type="slidenum">
+              <a:rPr lang="en-US"/>
+              <a:pPr/>
+              <a:t>2</a:t>
+            </a:fld>
+            <a:endParaRPr lang="en-US"/>
+          </a:p>
+        </p:txBody>
+      </p:sp>
+    </p:spTree>
+    <p:extLst>
+      <p:ext uri="{BB962C8B-B14F-4D97-AF65-F5344CB8AC3E}">
+        <p14:creationId xmlns:p14="http://schemas.microsoft.com/office/powerpoint/2010/main" val="2904073229"/>
+      </p:ext>
+    </p:extLst>
+  </p:cSld>
+  <p:clrMapOvr>
+    <a:masterClrMapping/>
+  </p:clrMapOvr>
+</p:notes>
+</file>
+
+<file path=ppt/notesSlides/notesSlide2.xml><?xml version="1.0" encoding="utf-8"?>
+<p:notes xmlns:a="http://schemas.openxmlformats.org/drawingml/2006/main" xmlns:r="http://schemas.openxmlformats.org/officeDocument/2006/relationships" xmlns:p="http://schemas.openxmlformats.org/presentationml/2006/main">
+  <p:cSld>
+    <p:spTree>
+      <p:nvGrpSpPr>
+        <p:cNvPr id="1" name=""/>
+        <p:cNvGrpSpPr/>
+        <p:nvPr/>
+      </p:nvGrpSpPr>
+      <p:grpSpPr>
+        <a:xfrm>
+          <a:off x="0" y="0"/>
+          <a:ext cx="0" cy="0"/>
+          <a:chOff x="0" y="0"/>
+          <a:chExt cx="0" cy="0"/>
+        </a:xfrm>
+      </p:grpSpPr>
+      <p:sp>
+        <p:nvSpPr>
+          <p:cNvPr id="18433" name="Slide Image Placeholder 1"/>
+          <p:cNvSpPr>
+            <a:spLocks noGrp="1" noRot="1" noChangeAspect="1"/>
+          </p:cNvSpPr>
+          <p:nvPr>
+            <p:ph type="sldImg"/>
+          </p:nvPr>
+        </p:nvSpPr>
+        <p:spPr bwMode="auto">
+          <a:xfrm>
+            <a:off x="381000" y="685800"/>
+            <a:ext cx="6096000" cy="3429000"/>
+          </a:xfrm>
+          <a:noFill/>
+          <a:ln>
+            <a:solidFill>
+              <a:srgbClr val="000000"/>
+            </a:solidFill>
+            <a:miter lim="800000"/>
+            <a:headEnd/>
+            <a:tailEnd/>
+          </a:ln>
+        </p:spPr>
+      </p:sp>
+      <p:sp>
+        <p:nvSpPr>
+          <p:cNvPr id="18434" name="Notes Placeholder 2"/>
+          <p:cNvSpPr>
+            <a:spLocks noGrp="1"/>
+          </p:cNvSpPr>
+          <p:nvPr>
+            <p:ph type="body" idx="1"/>
+          </p:nvPr>
+        </p:nvSpPr>
+        <p:spPr bwMode="auto">
+          <a:noFill/>
+        </p:spPr>
+        <p:txBody>
+          <a:bodyPr wrap="square" numCol="1" anchor="t" anchorCtr="0" compatLnSpc="1">
+            <a:prstTxWarp prst="textNoShape">
+              <a:avLst/>
+            </a:prstTxWarp>
+          </a:bodyPr>
+          <a:lstStyle/>
+          <a:p>
+            <a:pPr eaLnBrk="1" hangingPunct="1">
+              <a:spcBef>
+                <a:spcPct val="0"/>
+              </a:spcBef>
+            </a:pPr>
+            <a:endParaRPr lang="en-US">
+              <a:ea typeface="ＭＳ Ｐゴシック" pitchFamily="1" charset="-128"/>
+            </a:endParaRPr>
+          </a:p>
+        </p:txBody>
+      </p:sp>
+      <p:sp>
+        <p:nvSpPr>
+          <p:cNvPr id="18435" name="Slide Number Placeholder 3"/>
+          <p:cNvSpPr>
+            <a:spLocks noGrp="1"/>
+          </p:cNvSpPr>
+          <p:nvPr>
+            <p:ph type="sldNum" sz="quarter" idx="5"/>
+          </p:nvPr>
+        </p:nvSpPr>
+        <p:spPr bwMode="auto">
+          <a:noFill/>
+          <a:ln>
+            <a:miter lim="800000"/>
+            <a:headEnd/>
+            <a:tailEnd/>
+          </a:ln>
+        </p:spPr>
+        <p:txBody>
+          <a:bodyPr/>
+          <a:lstStyle/>
+          <a:p>
+            <a:fld id="{0CA7B74D-3791-4AC6-8451-F10DBCCCDD9A}" type="slidenum">
+              <a:rPr lang="en-US"/>
+              <a:pPr/>
+              <a:t>3</a:t>
+            </a:fld>
+            <a:endParaRPr lang="en-US"/>
+          </a:p>
+        </p:txBody>
+      </p:sp>
+    </p:spTree>
+    <p:extLst>
+      <p:ext uri="{BB962C8B-B14F-4D97-AF65-F5344CB8AC3E}">
+        <p14:creationId xmlns:p14="http://schemas.microsoft.com/office/powerpoint/2010/main" val="2335206292"/>
+      </p:ext>
+    </p:extLst>
+  </p:cSld>
+  <p:clrMapOvr>
+    <a:masterClrMapping/>
+  </p:clrMapOvr>
+</p:notes>
+</file>
+
+<file path=ppt/notesSlides/notesSlide3.xml><?xml version="1.0" encoding="utf-8"?>
+<p:notes xmlns:a="http://schemas.openxmlformats.org/drawingml/2006/main" xmlns:r="http://schemas.openxmlformats.org/officeDocument/2006/relationships" xmlns:p="http://schemas.openxmlformats.org/presentationml/2006/main">
+  <p:cSld>
+    <p:spTree>
+      <p:nvGrpSpPr>
+        <p:cNvPr id="1" name=""/>
+        <p:cNvGrpSpPr/>
+        <p:nvPr/>
+      </p:nvGrpSpPr>
+      <p:grpSpPr>
+        <a:xfrm>
+          <a:off x="0" y="0"/>
+          <a:ext cx="0" cy="0"/>
+          <a:chOff x="0" y="0"/>
+          <a:chExt cx="0" cy="0"/>
+        </a:xfrm>
+      </p:grpSpPr>
+      <p:sp>
+        <p:nvSpPr>
           <p:cNvPr id="18433" name="Slide Image Placeholder 1"/>
           <p:cNvSpPr>
             <a:spLocks noGrp="1" noRot="1" noChangeAspect="1"/>
@@ -726,7 +963,7 @@
                 <a:tabLst/>
                 <a:defRPr/>
               </a:pPr>
-              <a:t>1</a:t>
+              <a:t>4</a:t>
             </a:fld>
             <a:endParaRPr kumimoji="0" lang="en-US" sz="1200" b="0" i="0" u="none" strike="noStrike" kern="1200" cap="none" spc="0" normalizeH="0" baseline="0" noProof="0">
               <a:ln>
@@ -748,7 +985,7 @@
     </p:spTree>
     <p:extLst>
       <p:ext uri="{BB962C8B-B14F-4D97-AF65-F5344CB8AC3E}">
-        <p14:creationId xmlns:p14="http://schemas.microsoft.com/office/powerpoint/2010/main" val="3783576877"/>
+        <p14:creationId xmlns:p14="http://schemas.microsoft.com/office/powerpoint/2010/main" val="3773505461"/>
       </p:ext>
     </p:extLst>
   </p:cSld>
@@ -758,12 +995,18 @@
 </p:notes>
 </file>
 
-<file path=ppt/notesSlides/notesSlide2.xml><?xml version="1.0" encoding="utf-8"?>
+<file path=ppt/notesSlides/notesSlide4.xml><?xml version="1.0" encoding="utf-8"?>
 <p:notes xmlns:a="http://schemas.openxmlformats.org/drawingml/2006/main" xmlns:r="http://schemas.openxmlformats.org/officeDocument/2006/relationships" xmlns:p="http://schemas.openxmlformats.org/presentationml/2006/main">
   <p:cSld>
     <p:spTree>
       <p:nvGrpSpPr>
-        <p:cNvPr id="1" name=""/>
+        <p:cNvPr id="1" name="">
+          <a:extLst>
+            <a:ext uri="{FF2B5EF4-FFF2-40B4-BE49-F238E27FC236}">
+              <a16:creationId xmlns:a16="http://schemas.microsoft.com/office/drawing/2014/main" id="{9949F277-D966-5891-8E8E-FE1852E6B425}"/>
+            </a:ext>
+          </a:extLst>
+        </p:cNvPr>
         <p:cNvGrpSpPr/>
         <p:nvPr/>
       </p:nvGrpSpPr>
@@ -777,7 +1020,13 @@
       </p:grpSpPr>
       <p:sp>
         <p:nvSpPr>
-          <p:cNvPr id="16385" name="Slide Image Placeholder 1"/>
+          <p:cNvPr id="18433" name="Slide Image Placeholder 1">
+            <a:extLst>
+              <a:ext uri="{FF2B5EF4-FFF2-40B4-BE49-F238E27FC236}">
+                <a16:creationId xmlns:a16="http://schemas.microsoft.com/office/drawing/2014/main" id="{63166A99-EAE2-2E28-993F-D5871297B24D}"/>
+              </a:ext>
+            </a:extLst>
+          </p:cNvPr>
           <p:cNvSpPr>
             <a:spLocks noGrp="1" noRot="1" noChangeAspect="1"/>
           </p:cNvSpPr>
@@ -803,7 +1052,13 @@
       </p:sp>
       <p:sp>
         <p:nvSpPr>
-          <p:cNvPr id="16386" name="Notes Placeholder 2"/>
+          <p:cNvPr id="18434" name="Notes Placeholder 2">
+            <a:extLst>
+              <a:ext uri="{FF2B5EF4-FFF2-40B4-BE49-F238E27FC236}">
+                <a16:creationId xmlns:a16="http://schemas.microsoft.com/office/drawing/2014/main" id="{4ED88F3D-7791-59C8-716F-0AAD4C669A9A}"/>
+              </a:ext>
+            </a:extLst>
+          </p:cNvPr>
           <p:cNvSpPr>
             <a:spLocks noGrp="1"/>
           </p:cNvSpPr>
@@ -835,245 +1090,13 @@
       </p:sp>
       <p:sp>
         <p:nvSpPr>
-          <p:cNvPr id="16387" name="Slide Number Placeholder 3"/>
-          <p:cNvSpPr>
-            <a:spLocks noGrp="1"/>
-          </p:cNvSpPr>
-          <p:nvPr>
-            <p:ph type="sldNum" sz="quarter" idx="5"/>
-          </p:nvPr>
-        </p:nvSpPr>
-        <p:spPr bwMode="auto">
-          <a:noFill/>
-          <a:ln>
-            <a:miter lim="800000"/>
-            <a:headEnd/>
-            <a:tailEnd/>
-          </a:ln>
-        </p:spPr>
-        <p:txBody>
-          <a:bodyPr/>
-          <a:lstStyle/>
-          <a:p>
-            <a:fld id="{65F62A7E-A2F8-438F-9CF8-47DE63F471B4}" type="slidenum">
-              <a:rPr lang="en-US"/>
-              <a:pPr/>
-              <a:t>3</a:t>
-            </a:fld>
-            <a:endParaRPr lang="en-US"/>
-          </a:p>
-        </p:txBody>
-      </p:sp>
-    </p:spTree>
-    <p:extLst>
-      <p:ext uri="{BB962C8B-B14F-4D97-AF65-F5344CB8AC3E}">
-        <p14:creationId xmlns:p14="http://schemas.microsoft.com/office/powerpoint/2010/main" val="2904073229"/>
-      </p:ext>
-    </p:extLst>
-  </p:cSld>
-  <p:clrMapOvr>
-    <a:masterClrMapping/>
-  </p:clrMapOvr>
-</p:notes>
-</file>
-
-<file path=ppt/notesSlides/notesSlide3.xml><?xml version="1.0" encoding="utf-8"?>
-<p:notes xmlns:a="http://schemas.openxmlformats.org/drawingml/2006/main" xmlns:r="http://schemas.openxmlformats.org/officeDocument/2006/relationships" xmlns:p="http://schemas.openxmlformats.org/presentationml/2006/main">
-  <p:cSld>
-    <p:spTree>
-      <p:nvGrpSpPr>
-        <p:cNvPr id="1" name=""/>
-        <p:cNvGrpSpPr/>
-        <p:nvPr/>
-      </p:nvGrpSpPr>
-      <p:grpSpPr>
-        <a:xfrm>
-          <a:off x="0" y="0"/>
-          <a:ext cx="0" cy="0"/>
-          <a:chOff x="0" y="0"/>
-          <a:chExt cx="0" cy="0"/>
-        </a:xfrm>
-      </p:grpSpPr>
-      <p:sp>
-        <p:nvSpPr>
-          <p:cNvPr id="18433" name="Slide Image Placeholder 1"/>
-          <p:cNvSpPr>
-            <a:spLocks noGrp="1" noRot="1" noChangeAspect="1"/>
-          </p:cNvSpPr>
-          <p:nvPr>
-            <p:ph type="sldImg"/>
-          </p:nvPr>
-        </p:nvSpPr>
-        <p:spPr bwMode="auto">
-          <a:xfrm>
-            <a:off x="381000" y="685800"/>
-            <a:ext cx="6096000" cy="3429000"/>
-          </a:xfrm>
-          <a:noFill/>
-          <a:ln>
-            <a:solidFill>
-              <a:srgbClr val="000000"/>
-            </a:solidFill>
-            <a:miter lim="800000"/>
-            <a:headEnd/>
-            <a:tailEnd/>
-          </a:ln>
-        </p:spPr>
-      </p:sp>
-      <p:sp>
-        <p:nvSpPr>
-          <p:cNvPr id="18434" name="Notes Placeholder 2"/>
-          <p:cNvSpPr>
-            <a:spLocks noGrp="1"/>
-          </p:cNvSpPr>
-          <p:nvPr>
-            <p:ph type="body" idx="1"/>
-          </p:nvPr>
-        </p:nvSpPr>
-        <p:spPr bwMode="auto">
-          <a:noFill/>
-        </p:spPr>
-        <p:txBody>
-          <a:bodyPr wrap="square" numCol="1" anchor="t" anchorCtr="0" compatLnSpc="1">
-            <a:prstTxWarp prst="textNoShape">
-              <a:avLst/>
-            </a:prstTxWarp>
-          </a:bodyPr>
-          <a:lstStyle/>
-          <a:p>
-            <a:pPr eaLnBrk="1" hangingPunct="1">
-              <a:spcBef>
-                <a:spcPct val="0"/>
-              </a:spcBef>
-            </a:pPr>
-            <a:endParaRPr lang="en-US">
-              <a:ea typeface="ＭＳ Ｐゴシック" pitchFamily="1" charset="-128"/>
-            </a:endParaRPr>
-          </a:p>
-        </p:txBody>
-      </p:sp>
-      <p:sp>
-        <p:nvSpPr>
-          <p:cNvPr id="18435" name="Slide Number Placeholder 3"/>
-          <p:cNvSpPr>
-            <a:spLocks noGrp="1"/>
-          </p:cNvSpPr>
-          <p:nvPr>
-            <p:ph type="sldNum" sz="quarter" idx="5"/>
-          </p:nvPr>
-        </p:nvSpPr>
-        <p:spPr bwMode="auto">
-          <a:noFill/>
-          <a:ln>
-            <a:miter lim="800000"/>
-            <a:headEnd/>
-            <a:tailEnd/>
-          </a:ln>
-        </p:spPr>
-        <p:txBody>
-          <a:bodyPr/>
-          <a:lstStyle/>
-          <a:p>
-            <a:fld id="{0CA7B74D-3791-4AC6-8451-F10DBCCCDD9A}" type="slidenum">
-              <a:rPr lang="en-US"/>
-              <a:pPr/>
-              <a:t>4</a:t>
-            </a:fld>
-            <a:endParaRPr lang="en-US"/>
-          </a:p>
-        </p:txBody>
-      </p:sp>
-    </p:spTree>
-    <p:extLst>
-      <p:ext uri="{BB962C8B-B14F-4D97-AF65-F5344CB8AC3E}">
-        <p14:creationId xmlns:p14="http://schemas.microsoft.com/office/powerpoint/2010/main" val="2335206292"/>
-      </p:ext>
-    </p:extLst>
-  </p:cSld>
-  <p:clrMapOvr>
-    <a:masterClrMapping/>
-  </p:clrMapOvr>
-</p:notes>
-</file>
-
-<file path=ppt/notesSlides/notesSlide4.xml><?xml version="1.0" encoding="utf-8"?>
-<p:notes xmlns:a="http://schemas.openxmlformats.org/drawingml/2006/main" xmlns:r="http://schemas.openxmlformats.org/officeDocument/2006/relationships" xmlns:p="http://schemas.openxmlformats.org/presentationml/2006/main">
-  <p:cSld>
-    <p:spTree>
-      <p:nvGrpSpPr>
-        <p:cNvPr id="1" name=""/>
-        <p:cNvGrpSpPr/>
-        <p:nvPr/>
-      </p:nvGrpSpPr>
-      <p:grpSpPr>
-        <a:xfrm>
-          <a:off x="0" y="0"/>
-          <a:ext cx="0" cy="0"/>
-          <a:chOff x="0" y="0"/>
-          <a:chExt cx="0" cy="0"/>
-        </a:xfrm>
-      </p:grpSpPr>
-      <p:sp>
-        <p:nvSpPr>
-          <p:cNvPr id="18433" name="Slide Image Placeholder 1"/>
-          <p:cNvSpPr>
-            <a:spLocks noGrp="1" noRot="1" noChangeAspect="1"/>
-          </p:cNvSpPr>
-          <p:nvPr>
-            <p:ph type="sldImg"/>
-          </p:nvPr>
-        </p:nvSpPr>
-        <p:spPr bwMode="auto">
-          <a:xfrm>
-            <a:off x="381000" y="685800"/>
-            <a:ext cx="6096000" cy="3429000"/>
-          </a:xfrm>
-          <a:noFill/>
-          <a:ln>
-            <a:solidFill>
-              <a:srgbClr val="000000"/>
-            </a:solidFill>
-            <a:miter lim="800000"/>
-            <a:headEnd/>
-            <a:tailEnd/>
-          </a:ln>
-        </p:spPr>
-      </p:sp>
-      <p:sp>
-        <p:nvSpPr>
-          <p:cNvPr id="18434" name="Notes Placeholder 2"/>
-          <p:cNvSpPr>
-            <a:spLocks noGrp="1"/>
-          </p:cNvSpPr>
-          <p:nvPr>
-            <p:ph type="body" idx="1"/>
-          </p:nvPr>
-        </p:nvSpPr>
-        <p:spPr bwMode="auto">
-          <a:noFill/>
-        </p:spPr>
-        <p:txBody>
-          <a:bodyPr wrap="square" numCol="1" anchor="t" anchorCtr="0" compatLnSpc="1">
-            <a:prstTxWarp prst="textNoShape">
-              <a:avLst/>
-            </a:prstTxWarp>
-          </a:bodyPr>
-          <a:lstStyle/>
-          <a:p>
-            <a:pPr eaLnBrk="1" hangingPunct="1">
-              <a:spcBef>
-                <a:spcPct val="0"/>
-              </a:spcBef>
-            </a:pPr>
-            <a:endParaRPr lang="en-US">
-              <a:ea typeface="ＭＳ Ｐゴシック" pitchFamily="1" charset="-128"/>
-            </a:endParaRPr>
-          </a:p>
-        </p:txBody>
-      </p:sp>
-      <p:sp>
-        <p:nvSpPr>
-          <p:cNvPr id="18435" name="Slide Number Placeholder 3"/>
+          <p:cNvPr id="18435" name="Slide Number Placeholder 3">
+            <a:extLst>
+              <a:ext uri="{FF2B5EF4-FFF2-40B4-BE49-F238E27FC236}">
+                <a16:creationId xmlns:a16="http://schemas.microsoft.com/office/drawing/2014/main" id="{CC82298B-112C-33CB-5F98-D6F1C4A4C6DE}"/>
+              </a:ext>
+            </a:extLst>
+          </p:cNvPr>
           <p:cNvSpPr>
             <a:spLocks noGrp="1"/>
           </p:cNvSpPr>
@@ -1164,7 +1187,7 @@
     </p:spTree>
     <p:extLst>
       <p:ext uri="{BB962C8B-B14F-4D97-AF65-F5344CB8AC3E}">
-        <p14:creationId xmlns:p14="http://schemas.microsoft.com/office/powerpoint/2010/main" val="3773505461"/>
+        <p14:creationId xmlns:p14="http://schemas.microsoft.com/office/powerpoint/2010/main" val="4173051335"/>
       </p:ext>
     </p:extLst>
   </p:cSld>
@@ -1179,13 +1202,7 @@
   <p:cSld>
     <p:spTree>
       <p:nvGrpSpPr>
-        <p:cNvPr id="1" name="">
-          <a:extLst>
-            <a:ext uri="{FF2B5EF4-FFF2-40B4-BE49-F238E27FC236}">
-              <a16:creationId xmlns:a16="http://schemas.microsoft.com/office/drawing/2014/main" id="{9949F277-D966-5891-8E8E-FE1852E6B425}"/>
-            </a:ext>
-          </a:extLst>
-        </p:cNvPr>
+        <p:cNvPr id="1" name=""/>
         <p:cNvGrpSpPr/>
         <p:nvPr/>
       </p:nvGrpSpPr>
@@ -1199,13 +1216,7 @@
       </p:grpSpPr>
       <p:sp>
         <p:nvSpPr>
-          <p:cNvPr id="18433" name="Slide Image Placeholder 1">
-            <a:extLst>
-              <a:ext uri="{FF2B5EF4-FFF2-40B4-BE49-F238E27FC236}">
-                <a16:creationId xmlns:a16="http://schemas.microsoft.com/office/drawing/2014/main" id="{63166A99-EAE2-2E28-993F-D5871297B24D}"/>
-              </a:ext>
-            </a:extLst>
-          </p:cNvPr>
+          <p:cNvPr id="18433" name="Slide Image Placeholder 1"/>
           <p:cNvSpPr>
             <a:spLocks noGrp="1" noRot="1" noChangeAspect="1"/>
           </p:cNvSpPr>
@@ -1231,13 +1242,7 @@
       </p:sp>
       <p:sp>
         <p:nvSpPr>
-          <p:cNvPr id="18434" name="Notes Placeholder 2">
-            <a:extLst>
-              <a:ext uri="{FF2B5EF4-FFF2-40B4-BE49-F238E27FC236}">
-                <a16:creationId xmlns:a16="http://schemas.microsoft.com/office/drawing/2014/main" id="{4ED88F3D-7791-59C8-716F-0AAD4C669A9A}"/>
-              </a:ext>
-            </a:extLst>
-          </p:cNvPr>
+          <p:cNvPr id="18434" name="Notes Placeholder 2"/>
           <p:cNvSpPr>
             <a:spLocks noGrp="1"/>
           </p:cNvSpPr>
@@ -1269,13 +1274,7 @@
       </p:sp>
       <p:sp>
         <p:nvSpPr>
-          <p:cNvPr id="18435" name="Slide Number Placeholder 3">
-            <a:extLst>
-              <a:ext uri="{FF2B5EF4-FFF2-40B4-BE49-F238E27FC236}">
-                <a16:creationId xmlns:a16="http://schemas.microsoft.com/office/drawing/2014/main" id="{CC82298B-112C-33CB-5F98-D6F1C4A4C6DE}"/>
-              </a:ext>
-            </a:extLst>
-          </p:cNvPr>
+          <p:cNvPr id="18435" name="Slide Number Placeholder 3"/>
           <p:cNvSpPr>
             <a:spLocks noGrp="1"/>
           </p:cNvSpPr>
@@ -1366,184 +1365,6 @@
     </p:spTree>
     <p:extLst>
       <p:ext uri="{BB962C8B-B14F-4D97-AF65-F5344CB8AC3E}">
-        <p14:creationId xmlns:p14="http://schemas.microsoft.com/office/powerpoint/2010/main" val="4173051335"/>
-      </p:ext>
-    </p:extLst>
-  </p:cSld>
-  <p:clrMapOvr>
-    <a:masterClrMapping/>
-  </p:clrMapOvr>
-</p:notes>
-</file>
-
-<file path=ppt/notesSlides/notesSlide6.xml><?xml version="1.0" encoding="utf-8"?>
-<p:notes xmlns:a="http://schemas.openxmlformats.org/drawingml/2006/main" xmlns:r="http://schemas.openxmlformats.org/officeDocument/2006/relationships" xmlns:p="http://schemas.openxmlformats.org/presentationml/2006/main">
-  <p:cSld>
-    <p:spTree>
-      <p:nvGrpSpPr>
-        <p:cNvPr id="1" name=""/>
-        <p:cNvGrpSpPr/>
-        <p:nvPr/>
-      </p:nvGrpSpPr>
-      <p:grpSpPr>
-        <a:xfrm>
-          <a:off x="0" y="0"/>
-          <a:ext cx="0" cy="0"/>
-          <a:chOff x="0" y="0"/>
-          <a:chExt cx="0" cy="0"/>
-        </a:xfrm>
-      </p:grpSpPr>
-      <p:sp>
-        <p:nvSpPr>
-          <p:cNvPr id="18433" name="Slide Image Placeholder 1"/>
-          <p:cNvSpPr>
-            <a:spLocks noGrp="1" noRot="1" noChangeAspect="1"/>
-          </p:cNvSpPr>
-          <p:nvPr>
-            <p:ph type="sldImg"/>
-          </p:nvPr>
-        </p:nvSpPr>
-        <p:spPr bwMode="auto">
-          <a:xfrm>
-            <a:off x="381000" y="685800"/>
-            <a:ext cx="6096000" cy="3429000"/>
-          </a:xfrm>
-          <a:noFill/>
-          <a:ln>
-            <a:solidFill>
-              <a:srgbClr val="000000"/>
-            </a:solidFill>
-            <a:miter lim="800000"/>
-            <a:headEnd/>
-            <a:tailEnd/>
-          </a:ln>
-        </p:spPr>
-      </p:sp>
-      <p:sp>
-        <p:nvSpPr>
-          <p:cNvPr id="18434" name="Notes Placeholder 2"/>
-          <p:cNvSpPr>
-            <a:spLocks noGrp="1"/>
-          </p:cNvSpPr>
-          <p:nvPr>
-            <p:ph type="body" idx="1"/>
-          </p:nvPr>
-        </p:nvSpPr>
-        <p:spPr bwMode="auto">
-          <a:noFill/>
-        </p:spPr>
-        <p:txBody>
-          <a:bodyPr wrap="square" numCol="1" anchor="t" anchorCtr="0" compatLnSpc="1">
-            <a:prstTxWarp prst="textNoShape">
-              <a:avLst/>
-            </a:prstTxWarp>
-          </a:bodyPr>
-          <a:lstStyle/>
-          <a:p>
-            <a:pPr eaLnBrk="1" hangingPunct="1">
-              <a:spcBef>
-                <a:spcPct val="0"/>
-              </a:spcBef>
-            </a:pPr>
-            <a:endParaRPr lang="en-US">
-              <a:ea typeface="ＭＳ Ｐゴシック" pitchFamily="1" charset="-128"/>
-            </a:endParaRPr>
-          </a:p>
-        </p:txBody>
-      </p:sp>
-      <p:sp>
-        <p:nvSpPr>
-          <p:cNvPr id="18435" name="Slide Number Placeholder 3"/>
-          <p:cNvSpPr>
-            <a:spLocks noGrp="1"/>
-          </p:cNvSpPr>
-          <p:nvPr>
-            <p:ph type="sldNum" sz="quarter" idx="5"/>
-          </p:nvPr>
-        </p:nvSpPr>
-        <p:spPr bwMode="auto">
-          <a:noFill/>
-          <a:ln>
-            <a:miter lim="800000"/>
-            <a:headEnd/>
-            <a:tailEnd/>
-          </a:ln>
-        </p:spPr>
-        <p:txBody>
-          <a:bodyPr/>
-          <a:lstStyle/>
-          <a:p>
-            <a:pPr marL="0" marR="0" lvl="0" indent="0" algn="r" defTabSz="457200" rtl="0" eaLnBrk="1" fontAlgn="base" latinLnBrk="0" hangingPunct="1">
-              <a:lnSpc>
-                <a:spcPct val="100000"/>
-              </a:lnSpc>
-              <a:spcBef>
-                <a:spcPct val="0"/>
-              </a:spcBef>
-              <a:spcAft>
-                <a:spcPct val="0"/>
-              </a:spcAft>
-              <a:buClrTx/>
-              <a:buSzTx/>
-              <a:buFontTx/>
-              <a:buNone/>
-              <a:tabLst/>
-              <a:defRPr/>
-            </a:pPr>
-            <a:fld id="{0CA7B74D-3791-4AC6-8451-F10DBCCCDD9A}" type="slidenum">
-              <a:rPr kumimoji="0" lang="en-US" sz="1200" b="0" i="0" u="none" strike="noStrike" kern="1200" cap="none" spc="0" normalizeH="0" baseline="0" noProof="0">
-                <a:ln>
-                  <a:noFill/>
-                </a:ln>
-                <a:solidFill>
-                  <a:prstClr val="black"/>
-                </a:solidFill>
-                <a:effectLst/>
-                <a:uLnTx/>
-                <a:uFillTx/>
-                <a:latin typeface="Calibri" pitchFamily="34" charset="0"/>
-                <a:ea typeface="ＭＳ Ｐゴシック" pitchFamily="1" charset="-128"/>
-                <a:cs typeface="+mn-cs"/>
-              </a:rPr>
-              <a:pPr marL="0" marR="0" lvl="0" indent="0" algn="r" defTabSz="457200" rtl="0" eaLnBrk="1" fontAlgn="base" latinLnBrk="0" hangingPunct="1">
-                <a:lnSpc>
-                  <a:spcPct val="100000"/>
-                </a:lnSpc>
-                <a:spcBef>
-                  <a:spcPct val="0"/>
-                </a:spcBef>
-                <a:spcAft>
-                  <a:spcPct val="0"/>
-                </a:spcAft>
-                <a:buClrTx/>
-                <a:buSzTx/>
-                <a:buFontTx/>
-                <a:buNone/>
-                <a:tabLst/>
-                <a:defRPr/>
-              </a:pPr>
-              <a:t>7</a:t>
-            </a:fld>
-            <a:endParaRPr kumimoji="0" lang="en-US" sz="1200" b="0" i="0" u="none" strike="noStrike" kern="1200" cap="none" spc="0" normalizeH="0" baseline="0" noProof="0">
-              <a:ln>
-                <a:noFill/>
-              </a:ln>
-              <a:solidFill>
-                <a:prstClr val="black"/>
-              </a:solidFill>
-              <a:effectLst/>
-              <a:uLnTx/>
-              <a:uFillTx/>
-              <a:latin typeface="Calibri" pitchFamily="34" charset="0"/>
-              <a:ea typeface="ＭＳ Ｐゴシック" pitchFamily="1" charset="-128"/>
-              <a:cs typeface="+mn-cs"/>
-            </a:endParaRPr>
-          </a:p>
-        </p:txBody>
-      </p:sp>
-    </p:spTree>
-    <p:extLst>
-      <p:ext uri="{BB962C8B-B14F-4D97-AF65-F5344CB8AC3E}">
         <p14:creationId xmlns:p14="http://schemas.microsoft.com/office/powerpoint/2010/main" val="1908672725"/>
       </p:ext>
     </p:extLst>
@@ -1737,7 +1558,7 @@
           <a:p>
             <a:fld id="{E60792E3-D524-454C-8AFD-A91972900BCB}" type="datetime1">
               <a:rPr lang="en-US" smtClean="0"/>
-              <a:t>7/24/2026</a:t>
+              <a:t>7/26/2026</a:t>
             </a:fld>
             <a:endParaRPr lang="en-US"/>
           </a:p>
@@ -1919,7 +1740,7 @@
           <a:p>
             <a:fld id="{053C3A68-6922-42D3-8905-ECC2D82A3469}" type="datetime1">
               <a:rPr lang="en-US" smtClean="0"/>
-              <a:t>7/24/2026</a:t>
+              <a:t>7/26/2026</a:t>
             </a:fld>
             <a:endParaRPr lang="en-US"/>
           </a:p>
@@ -2111,7 +1932,7 @@
           <a:p>
             <a:fld id="{CB69E9F4-7604-4950-A8B2-8ACDEDB1506E}" type="datetime1">
               <a:rPr lang="en-US" smtClean="0"/>
-              <a:t>7/24/2026</a:t>
+              <a:t>7/26/2026</a:t>
             </a:fld>
             <a:endParaRPr lang="en-US"/>
           </a:p>
@@ -2293,7 +2114,7 @@
           <a:p>
             <a:fld id="{708B7524-32A2-4C20-A58C-BC3BAA1042FC}" type="datetime1">
               <a:rPr lang="en-US" smtClean="0"/>
-              <a:t>7/24/2026</a:t>
+              <a:t>7/26/2026</a:t>
             </a:fld>
             <a:endParaRPr lang="en-US"/>
           </a:p>
@@ -2552,7 +2373,7 @@
           <a:p>
             <a:fld id="{1E994447-D6B2-43BB-A877-57F1A267B999}" type="datetime1">
               <a:rPr lang="en-US" smtClean="0"/>
-              <a:t>7/24/2026</a:t>
+              <a:t>7/26/2026</a:t>
             </a:fld>
             <a:endParaRPr lang="en-US"/>
           </a:p>
@@ -2851,7 +2672,7 @@
           <a:p>
             <a:fld id="{68920E16-BD35-483C-AA6B-346FC7E46DEA}" type="datetime1">
               <a:rPr lang="en-US" smtClean="0"/>
-              <a:t>7/24/2026</a:t>
+              <a:t>7/26/2026</a:t>
             </a:fld>
             <a:endParaRPr lang="en-US"/>
           </a:p>
@@ -3284,7 +3105,7 @@
           <a:p>
             <a:fld id="{2FEAC6F8-5103-4FC0-A69E-5C6AE6469DA8}" type="datetime1">
               <a:rPr lang="en-US" smtClean="0"/>
-              <a:t>7/24/2026</a:t>
+              <a:t>7/26/2026</a:t>
             </a:fld>
             <a:endParaRPr lang="en-US"/>
           </a:p>
@@ -3415,7 +3236,7 @@
           <a:p>
             <a:fld id="{C60C6921-0627-4C8F-83D5-0CF936D2FFDD}" type="datetime1">
               <a:rPr lang="en-US" smtClean="0"/>
-              <a:t>7/24/2026</a:t>
+              <a:t>7/26/2026</a:t>
             </a:fld>
             <a:endParaRPr lang="en-US"/>
           </a:p>
@@ -3524,7 +3345,7 @@
           <a:p>
             <a:fld id="{2FF08AD7-8103-40F8-983C-E2BA6BB9CBE0}" type="datetime1">
               <a:rPr lang="en-US" smtClean="0"/>
-              <a:t>7/24/2026</a:t>
+              <a:t>7/26/2026</a:t>
             </a:fld>
             <a:endParaRPr lang="en-US"/>
           </a:p>
@@ -3813,7 +3634,7 @@
           <a:p>
             <a:fld id="{DF8C06B4-9380-4A4D-AF49-A3596E17DAF5}" type="datetime1">
               <a:rPr lang="en-US" smtClean="0"/>
-              <a:t>7/24/2026</a:t>
+              <a:t>7/26/2026</a:t>
             </a:fld>
             <a:endParaRPr lang="en-US"/>
           </a:p>
@@ -4082,7 +3903,7 @@
           <a:p>
             <a:fld id="{EF7FDEF1-C582-4E22-9E77-D68326471F28}" type="datetime1">
               <a:rPr lang="en-US" smtClean="0"/>
-              <a:t>7/24/2026</a:t>
+              <a:t>7/26/2026</a:t>
             </a:fld>
             <a:endParaRPr lang="en-US"/>
           </a:p>
@@ -4325,7 +4146,7 @@
           <a:p>
             <a:fld id="{780A9602-A9A9-453F-AEF1-37B5837E02CD}" type="datetime1">
               <a:rPr lang="en-US" smtClean="0"/>
-              <a:t>7/24/2026</a:t>
+              <a:t>7/26/2026</a:t>
             </a:fld>
             <a:endParaRPr lang="en-US"/>
           </a:p>
@@ -4862,6 +4683,1319 @@
       </p:grpSpPr>
       <p:sp>
         <p:nvSpPr>
+          <p:cNvPr id="4" name="Footer Placeholder 3">
+            <a:extLst>
+              <a:ext uri="{FF2B5EF4-FFF2-40B4-BE49-F238E27FC236}">
+                <a16:creationId xmlns:a16="http://schemas.microsoft.com/office/drawing/2014/main" id="{C2A033A5-F70E-7E73-0B8C-FA62C08DEB56}"/>
+              </a:ext>
+            </a:extLst>
+          </p:cNvPr>
+          <p:cNvSpPr>
+            <a:spLocks noGrp="1"/>
+          </p:cNvSpPr>
+          <p:nvPr>
+            <p:ph type="ftr" sz="quarter" idx="11"/>
+          </p:nvPr>
+        </p:nvSpPr>
+        <p:spPr/>
+        <p:txBody>
+          <a:bodyPr/>
+          <a:lstStyle/>
+          <a:p>
+            <a:pPr>
+              <a:defRPr/>
+            </a:pPr>
+            <a:r>
+              <a:rPr lang="en-US"/>
+              <a:t>@SIH Idea submission- Template</a:t>
+            </a:r>
+          </a:p>
+        </p:txBody>
+      </p:sp>
+      <p:sp>
+        <p:nvSpPr>
+          <p:cNvPr id="5" name="Slide Number Placeholder 4">
+            <a:extLst>
+              <a:ext uri="{FF2B5EF4-FFF2-40B4-BE49-F238E27FC236}">
+                <a16:creationId xmlns:a16="http://schemas.microsoft.com/office/drawing/2014/main" id="{EC99EC04-BCF1-5A69-7D5A-95D43C9763A1}"/>
+              </a:ext>
+            </a:extLst>
+          </p:cNvPr>
+          <p:cNvSpPr>
+            <a:spLocks noGrp="1"/>
+          </p:cNvSpPr>
+          <p:nvPr>
+            <p:ph type="sldNum" sz="quarter" idx="12"/>
+          </p:nvPr>
+        </p:nvSpPr>
+        <p:spPr/>
+        <p:txBody>
+          <a:bodyPr/>
+          <a:lstStyle/>
+          <a:p>
+            <a:fld id="{677C3CE7-23F7-4828-823C-E0205DF2CF97}" type="slidenum">
+              <a:rPr lang="en-US" smtClean="0"/>
+              <a:pPr/>
+              <a:t>1</a:t>
+            </a:fld>
+            <a:endParaRPr lang="en-US"/>
+          </a:p>
+        </p:txBody>
+      </p:sp>
+      <p:sp>
+        <p:nvSpPr>
+          <p:cNvPr id="6" name="Subtitle 3">
+            <a:extLst>
+              <a:ext uri="{FF2B5EF4-FFF2-40B4-BE49-F238E27FC236}">
+                <a16:creationId xmlns:a16="http://schemas.microsoft.com/office/drawing/2014/main" id="{E0A8E5C6-6BFC-01E5-DDF5-B6A7738A64F4}"/>
+              </a:ext>
+            </a:extLst>
+          </p:cNvPr>
+          <p:cNvSpPr txBox="1">
+            <a:spLocks/>
+          </p:cNvSpPr>
+          <p:nvPr/>
+        </p:nvSpPr>
+        <p:spPr bwMode="auto">
+          <a:xfrm>
+            <a:off x="1415369" y="223496"/>
+            <a:ext cx="8534400" cy="1752600"/>
+          </a:xfrm>
+          <a:prstGeom prst="rect">
+            <a:avLst/>
+          </a:prstGeom>
+          <a:noFill/>
+          <a:ln w="9525">
+            <a:noFill/>
+            <a:miter lim="800000"/>
+            <a:headEnd/>
+            <a:tailEnd/>
+          </a:ln>
+        </p:spPr>
+        <p:txBody>
+          <a:bodyPr vert="horz" wrap="square" lIns="91440" tIns="45720" rIns="91440" bIns="45720" numCol="1" anchor="t" anchorCtr="0" compatLnSpc="1">
+            <a:prstTxWarp prst="textNoShape">
+              <a:avLst/>
+            </a:prstTxWarp>
+          </a:bodyPr>
+          <a:lstStyle>
+            <a:lvl1pPr marL="0" indent="0" algn="ctr" defTabSz="457200" rtl="0" eaLnBrk="0" fontAlgn="base" hangingPunct="0">
+              <a:spcBef>
+                <a:spcPct val="20000"/>
+              </a:spcBef>
+              <a:spcAft>
+                <a:spcPct val="0"/>
+              </a:spcAft>
+              <a:buFont typeface="Arial" pitchFamily="34" charset="0"/>
+              <a:buNone/>
+              <a:defRPr sz="3200" kern="1200">
+                <a:solidFill>
+                  <a:schemeClr val="tx1">
+                    <a:tint val="75000"/>
+                  </a:schemeClr>
+                </a:solidFill>
+                <a:latin typeface="TradeGothic"/>
+                <a:ea typeface="ＭＳ Ｐゴシック" charset="0"/>
+                <a:cs typeface="ＭＳ Ｐゴシック" charset="0"/>
+              </a:defRPr>
+            </a:lvl1pPr>
+            <a:lvl2pPr marL="457200" indent="0" algn="ctr" defTabSz="457200" rtl="0" eaLnBrk="0" fontAlgn="base" hangingPunct="0">
+              <a:spcBef>
+                <a:spcPct val="20000"/>
+              </a:spcBef>
+              <a:spcAft>
+                <a:spcPct val="0"/>
+              </a:spcAft>
+              <a:buFont typeface="Arial" pitchFamily="34" charset="0"/>
+              <a:buNone/>
+              <a:defRPr sz="2800" kern="1200">
+                <a:solidFill>
+                  <a:schemeClr val="tx1">
+                    <a:tint val="75000"/>
+                  </a:schemeClr>
+                </a:solidFill>
+                <a:latin typeface="TradeGothic"/>
+                <a:ea typeface="ＭＳ Ｐゴシック" charset="0"/>
+                <a:cs typeface="+mn-cs"/>
+              </a:defRPr>
+            </a:lvl2pPr>
+            <a:lvl3pPr marL="914400" indent="0" algn="ctr" defTabSz="457200" rtl="0" eaLnBrk="0" fontAlgn="base" hangingPunct="0">
+              <a:spcBef>
+                <a:spcPct val="20000"/>
+              </a:spcBef>
+              <a:spcAft>
+                <a:spcPct val="0"/>
+              </a:spcAft>
+              <a:buFont typeface="Arial" pitchFamily="34" charset="0"/>
+              <a:buNone/>
+              <a:defRPr sz="2400" kern="1200">
+                <a:solidFill>
+                  <a:schemeClr val="tx1">
+                    <a:tint val="75000"/>
+                  </a:schemeClr>
+                </a:solidFill>
+                <a:latin typeface="TradeGothic"/>
+                <a:ea typeface="ＭＳ Ｐゴシック" charset="0"/>
+                <a:cs typeface="+mn-cs"/>
+              </a:defRPr>
+            </a:lvl3pPr>
+            <a:lvl4pPr marL="1371600" indent="0" algn="ctr" defTabSz="457200" rtl="0" eaLnBrk="0" fontAlgn="base" hangingPunct="0">
+              <a:spcBef>
+                <a:spcPct val="20000"/>
+              </a:spcBef>
+              <a:spcAft>
+                <a:spcPct val="0"/>
+              </a:spcAft>
+              <a:buFont typeface="Arial" pitchFamily="34" charset="0"/>
+              <a:buNone/>
+              <a:defRPr sz="2000" kern="1200">
+                <a:solidFill>
+                  <a:schemeClr val="tx1">
+                    <a:tint val="75000"/>
+                  </a:schemeClr>
+                </a:solidFill>
+                <a:latin typeface="TradeGothic"/>
+                <a:ea typeface="ＭＳ Ｐゴシック" charset="0"/>
+                <a:cs typeface="+mn-cs"/>
+              </a:defRPr>
+            </a:lvl4pPr>
+            <a:lvl5pPr marL="1828800" indent="0" algn="ctr" defTabSz="457200" rtl="0" eaLnBrk="0" fontAlgn="base" hangingPunct="0">
+              <a:spcBef>
+                <a:spcPct val="20000"/>
+              </a:spcBef>
+              <a:spcAft>
+                <a:spcPct val="0"/>
+              </a:spcAft>
+              <a:buFont typeface="Arial" pitchFamily="34" charset="0"/>
+              <a:buNone/>
+              <a:defRPr sz="2000" kern="1200">
+                <a:solidFill>
+                  <a:schemeClr val="tx1">
+                    <a:tint val="75000"/>
+                  </a:schemeClr>
+                </a:solidFill>
+                <a:latin typeface="TradeGothic"/>
+                <a:ea typeface="ＭＳ Ｐゴシック" charset="0"/>
+                <a:cs typeface="+mn-cs"/>
+              </a:defRPr>
+            </a:lvl5pPr>
+            <a:lvl6pPr marL="2286000" indent="0" algn="ctr" defTabSz="457200" rtl="0" eaLnBrk="1" latinLnBrk="0" hangingPunct="1">
+              <a:spcBef>
+                <a:spcPct val="20000"/>
+              </a:spcBef>
+              <a:buFont typeface="Arial"/>
+              <a:buNone/>
+              <a:defRPr sz="2000" kern="1200">
+                <a:solidFill>
+                  <a:schemeClr val="tx1">
+                    <a:tint val="75000"/>
+                  </a:schemeClr>
+                </a:solidFill>
+                <a:latin typeface="+mn-lt"/>
+                <a:ea typeface="+mn-ea"/>
+                <a:cs typeface="+mn-cs"/>
+              </a:defRPr>
+            </a:lvl6pPr>
+            <a:lvl7pPr marL="2743200" indent="0" algn="ctr" defTabSz="457200" rtl="0" eaLnBrk="1" latinLnBrk="0" hangingPunct="1">
+              <a:spcBef>
+                <a:spcPct val="20000"/>
+              </a:spcBef>
+              <a:buFont typeface="Arial"/>
+              <a:buNone/>
+              <a:defRPr sz="2000" kern="1200">
+                <a:solidFill>
+                  <a:schemeClr val="tx1">
+                    <a:tint val="75000"/>
+                  </a:schemeClr>
+                </a:solidFill>
+                <a:latin typeface="+mn-lt"/>
+                <a:ea typeface="+mn-ea"/>
+                <a:cs typeface="+mn-cs"/>
+              </a:defRPr>
+            </a:lvl7pPr>
+            <a:lvl8pPr marL="3200400" indent="0" algn="ctr" defTabSz="457200" rtl="0" eaLnBrk="1" latinLnBrk="0" hangingPunct="1">
+              <a:spcBef>
+                <a:spcPct val="20000"/>
+              </a:spcBef>
+              <a:buFont typeface="Arial"/>
+              <a:buNone/>
+              <a:defRPr sz="2000" kern="1200">
+                <a:solidFill>
+                  <a:schemeClr val="tx1">
+                    <a:tint val="75000"/>
+                  </a:schemeClr>
+                </a:solidFill>
+                <a:latin typeface="+mn-lt"/>
+                <a:ea typeface="+mn-ea"/>
+                <a:cs typeface="+mn-cs"/>
+              </a:defRPr>
+            </a:lvl8pPr>
+            <a:lvl9pPr marL="3657600" indent="0" algn="ctr" defTabSz="457200" rtl="0" eaLnBrk="1" latinLnBrk="0" hangingPunct="1">
+              <a:spcBef>
+                <a:spcPct val="20000"/>
+              </a:spcBef>
+              <a:buFont typeface="Arial"/>
+              <a:buNone/>
+              <a:defRPr sz="2000" kern="1200">
+                <a:solidFill>
+                  <a:schemeClr val="tx1">
+                    <a:tint val="75000"/>
+                  </a:schemeClr>
+                </a:solidFill>
+                <a:latin typeface="+mn-lt"/>
+                <a:ea typeface="+mn-ea"/>
+                <a:cs typeface="+mn-cs"/>
+              </a:defRPr>
+            </a:lvl9pPr>
+          </a:lstStyle>
+          <a:p>
+            <a:r>
+              <a:rPr lang="en-IN" sz="3600" b="1" dirty="0" err="1">
+                <a:solidFill>
+                  <a:schemeClr val="tx1"/>
+                </a:solidFill>
+              </a:rPr>
+              <a:t>SentinelAI</a:t>
+            </a:r>
+            <a:endParaRPr lang="en-IN" sz="3600" b="1" dirty="0">
+              <a:solidFill>
+                <a:schemeClr val="tx1"/>
+              </a:solidFill>
+              <a:latin typeface="Times New Roman" panose="02020603050405020304" pitchFamily="18" charset="0"/>
+              <a:cs typeface="Times New Roman" panose="02020603050405020304" pitchFamily="18" charset="0"/>
+            </a:endParaRPr>
+          </a:p>
+        </p:txBody>
+      </p:sp>
+      <p:sp>
+        <p:nvSpPr>
+          <p:cNvPr id="7" name="TextBox 6">
+            <a:extLst>
+              <a:ext uri="{FF2B5EF4-FFF2-40B4-BE49-F238E27FC236}">
+                <a16:creationId xmlns:a16="http://schemas.microsoft.com/office/drawing/2014/main" id="{AFB1BDE7-2DA0-F526-CF6E-F50D43C2C5FE}"/>
+              </a:ext>
+            </a:extLst>
+          </p:cNvPr>
+          <p:cNvSpPr txBox="1"/>
+          <p:nvPr/>
+        </p:nvSpPr>
+        <p:spPr>
+          <a:xfrm>
+            <a:off x="314633" y="944773"/>
+            <a:ext cx="11661058" cy="5425331"/>
+          </a:xfrm>
+          <a:prstGeom prst="rect">
+            <a:avLst/>
+          </a:prstGeom>
+          <a:noFill/>
+        </p:spPr>
+        <p:txBody>
+          <a:bodyPr wrap="square" rtlCol="0">
+            <a:spAutoFit/>
+          </a:bodyPr>
+          <a:lstStyle/>
+          <a:p>
+            <a:endParaRPr lang="en-US" dirty="0"/>
+          </a:p>
+          <a:p>
+            <a:pPr marL="285750" indent="-285750" algn="just">
+              <a:lnSpc>
+                <a:spcPct val="200000"/>
+              </a:lnSpc>
+              <a:buFont typeface="Arial" panose="020B0604020202020204" pitchFamily="34" charset="0"/>
+              <a:buChar char="•"/>
+            </a:pPr>
+            <a:r>
+              <a:rPr lang="en-US" sz="2400" b="1" dirty="0">
+                <a:latin typeface="Arial" panose="020B0604020202020204" pitchFamily="34" charset="0"/>
+                <a:cs typeface="Arial" panose="020B0604020202020204" pitchFamily="34" charset="0"/>
+              </a:rPr>
+              <a:t>Problem Statement ID – </a:t>
+            </a:r>
+            <a:r>
+              <a:rPr lang="en-US" sz="2400" dirty="0">
+                <a:latin typeface="Arial" panose="020B0604020202020204" pitchFamily="34" charset="0"/>
+                <a:cs typeface="Arial" panose="020B0604020202020204" pitchFamily="34" charset="0"/>
+              </a:rPr>
+              <a:t>1</a:t>
+            </a:r>
+          </a:p>
+          <a:p>
+            <a:pPr marL="285750" indent="-285750" algn="just">
+              <a:lnSpc>
+                <a:spcPct val="200000"/>
+              </a:lnSpc>
+              <a:buFont typeface="Arial" panose="020B0604020202020204" pitchFamily="34" charset="0"/>
+              <a:buChar char="•"/>
+            </a:pPr>
+            <a:r>
+              <a:rPr lang="en-US" sz="2400" b="1" dirty="0">
+                <a:latin typeface="Arial" panose="020B0604020202020204" pitchFamily="34" charset="0"/>
+                <a:cs typeface="Arial" panose="020B0604020202020204" pitchFamily="34" charset="0"/>
+              </a:rPr>
+              <a:t>Problem Statement Title- </a:t>
+            </a:r>
+            <a:r>
+              <a:rPr lang="en-IN" sz="2400" dirty="0"/>
+              <a:t>AI-Powered Autonomous Smart Building Optimization Challenge</a:t>
+            </a:r>
+            <a:endParaRPr lang="en-US" sz="2400" b="1" dirty="0">
+              <a:latin typeface="Arial" panose="020B0604020202020204" pitchFamily="34" charset="0"/>
+              <a:cs typeface="Arial" panose="020B0604020202020204" pitchFamily="34" charset="0"/>
+            </a:endParaRPr>
+          </a:p>
+          <a:p>
+            <a:pPr marL="285750" indent="-285750" algn="just">
+              <a:lnSpc>
+                <a:spcPct val="200000"/>
+              </a:lnSpc>
+              <a:buFont typeface="Arial" panose="020B0604020202020204" pitchFamily="34" charset="0"/>
+              <a:buChar char="•"/>
+            </a:pPr>
+            <a:r>
+              <a:rPr lang="en-US" sz="2400" b="1" dirty="0">
+                <a:latin typeface="Arial" panose="020B0604020202020204" pitchFamily="34" charset="0"/>
+                <a:cs typeface="Arial" panose="020B0604020202020204" pitchFamily="34" charset="0"/>
+              </a:rPr>
+              <a:t>Theme- </a:t>
+            </a:r>
+            <a:r>
+              <a:rPr lang="en-US" sz="2400" dirty="0">
+                <a:latin typeface="Arial" panose="020B0604020202020204" pitchFamily="34" charset="0"/>
+                <a:cs typeface="Arial" panose="020B0604020202020204" pitchFamily="34" charset="0"/>
+              </a:rPr>
+              <a:t>Artificial Intelligence / Smart Buildings</a:t>
+            </a:r>
+          </a:p>
+          <a:p>
+            <a:pPr marL="285750" indent="-285750" algn="just">
+              <a:lnSpc>
+                <a:spcPct val="200000"/>
+              </a:lnSpc>
+              <a:buFont typeface="Arial" panose="020B0604020202020204" pitchFamily="34" charset="0"/>
+              <a:buChar char="•"/>
+            </a:pPr>
+            <a:r>
+              <a:rPr lang="en-US" sz="2400" b="1" dirty="0">
+                <a:latin typeface="Arial" panose="020B0604020202020204" pitchFamily="34" charset="0"/>
+                <a:cs typeface="Arial" panose="020B0604020202020204" pitchFamily="34" charset="0"/>
+              </a:rPr>
+              <a:t>PS Category- </a:t>
+            </a:r>
+            <a:r>
+              <a:rPr lang="en-US" sz="2400" dirty="0">
+                <a:latin typeface="Arial" panose="020B0604020202020204" pitchFamily="34" charset="0"/>
+                <a:cs typeface="Arial" panose="020B0604020202020204" pitchFamily="34" charset="0"/>
+              </a:rPr>
+              <a:t>Software</a:t>
+            </a:r>
+          </a:p>
+          <a:p>
+            <a:pPr marL="285750" indent="-285750" algn="just">
+              <a:lnSpc>
+                <a:spcPct val="200000"/>
+              </a:lnSpc>
+              <a:buFont typeface="Arial" panose="020B0604020202020204" pitchFamily="34" charset="0"/>
+              <a:buChar char="•"/>
+            </a:pPr>
+            <a:r>
+              <a:rPr lang="en-US" sz="2400" b="1" dirty="0">
+                <a:latin typeface="Arial" panose="020B0604020202020204" pitchFamily="34" charset="0"/>
+                <a:cs typeface="Arial" panose="020B0604020202020204" pitchFamily="34" charset="0"/>
+              </a:rPr>
+              <a:t>Student Name (Registered on portal): </a:t>
+            </a:r>
+            <a:r>
+              <a:rPr lang="en-US" sz="2400" dirty="0">
+                <a:latin typeface="Arial" panose="020B0604020202020204" pitchFamily="34" charset="0"/>
+                <a:cs typeface="Arial" panose="020B0604020202020204" pitchFamily="34" charset="0"/>
+              </a:rPr>
+              <a:t>Soumyadip Chakrabarti</a:t>
+            </a:r>
+            <a:endParaRPr lang="en-US" sz="2400" b="1" dirty="0">
+              <a:latin typeface="Arial" panose="020B0604020202020204" pitchFamily="34" charset="0"/>
+              <a:cs typeface="Arial" panose="020B0604020202020204" pitchFamily="34" charset="0"/>
+            </a:endParaRPr>
+          </a:p>
+          <a:p>
+            <a:pPr marL="285750" indent="-285750" algn="just">
+              <a:lnSpc>
+                <a:spcPct val="200000"/>
+              </a:lnSpc>
+              <a:buFont typeface="Arial" panose="020B0604020202020204" pitchFamily="34" charset="0"/>
+              <a:buChar char="•"/>
+            </a:pPr>
+            <a:r>
+              <a:rPr lang="en-US" sz="2400" b="1" dirty="0">
+                <a:latin typeface="Arial" panose="020B0604020202020204" pitchFamily="34" charset="0"/>
+                <a:cs typeface="Arial" panose="020B0604020202020204" pitchFamily="34" charset="0"/>
+              </a:rPr>
+              <a:t>Student ID: </a:t>
+            </a:r>
+            <a:r>
+              <a:rPr lang="en-US" sz="2400" dirty="0">
+                <a:latin typeface="Arial" panose="020B0604020202020204" pitchFamily="34" charset="0"/>
+                <a:cs typeface="Arial" panose="020B0604020202020204" pitchFamily="34" charset="0"/>
+              </a:rPr>
+              <a:t>23BAI1265</a:t>
+            </a:r>
+            <a:endParaRPr lang="en-IN" sz="2400" b="1" dirty="0">
+              <a:latin typeface="Arial" panose="020B0604020202020204" pitchFamily="34" charset="0"/>
+              <a:cs typeface="Arial" panose="020B0604020202020204" pitchFamily="34" charset="0"/>
+            </a:endParaRPr>
+          </a:p>
+        </p:txBody>
+      </p:sp>
+    </p:spTree>
+    <p:extLst>
+      <p:ext uri="{BB962C8B-B14F-4D97-AF65-F5344CB8AC3E}">
+        <p14:creationId xmlns:p14="http://schemas.microsoft.com/office/powerpoint/2010/main" val="3319884780"/>
+      </p:ext>
+    </p:extLst>
+  </p:cSld>
+  <p:clrMapOvr>
+    <a:masterClrMapping/>
+  </p:clrMapOvr>
+</p:sld>
+</file>
+
+<file path=ppt/slides/slide2.xml><?xml version="1.0" encoding="utf-8"?>
+<p:sld xmlns:a="http://schemas.openxmlformats.org/drawingml/2006/main" xmlns:r="http://schemas.openxmlformats.org/officeDocument/2006/relationships" xmlns:p="http://schemas.openxmlformats.org/presentationml/2006/main">
+  <p:cSld>
+    <p:spTree>
+      <p:nvGrpSpPr>
+        <p:cNvPr id="1" name=""/>
+        <p:cNvGrpSpPr/>
+        <p:nvPr/>
+      </p:nvGrpSpPr>
+      <p:grpSpPr>
+        <a:xfrm>
+          <a:off x="0" y="0"/>
+          <a:ext cx="0" cy="0"/>
+          <a:chOff x="0" y="0"/>
+          <a:chExt cx="0" cy="0"/>
+        </a:xfrm>
+      </p:grpSpPr>
+      <p:sp>
+        <p:nvSpPr>
+          <p:cNvPr id="15361" name="Title 1"/>
+          <p:cNvSpPr>
+            <a:spLocks noGrp="1"/>
+          </p:cNvSpPr>
+          <p:nvPr>
+            <p:ph type="title"/>
+          </p:nvPr>
+        </p:nvSpPr>
+        <p:spPr>
+          <a:xfrm>
+            <a:off x="609600" y="209283"/>
+            <a:ext cx="10972800" cy="1143000"/>
+          </a:xfrm>
+        </p:spPr>
+        <p:txBody>
+          <a:bodyPr/>
+          <a:lstStyle/>
+          <a:p>
+            <a:pPr eaLnBrk="1" hangingPunct="1"/>
+            <a:r>
+              <a:rPr lang="en-IN" sz="3600" dirty="0" err="1"/>
+              <a:t>SentinelAI</a:t>
+            </a:r>
+            <a:r>
+              <a:rPr lang="en-IN" sz="3600" dirty="0"/>
+              <a:t>: Autonomous AI-Powered Building Management System</a:t>
+            </a:r>
+            <a:endParaRPr lang="en-US" sz="3600" dirty="0">
+              <a:latin typeface="Times New Roman" panose="02020603050405020304" pitchFamily="18" charset="0"/>
+              <a:ea typeface="ＭＳ Ｐゴシック" pitchFamily="1" charset="-128"/>
+              <a:cs typeface="Times New Roman" panose="02020603050405020304" pitchFamily="18" charset="0"/>
+            </a:endParaRPr>
+          </a:p>
+        </p:txBody>
+      </p:sp>
+      <p:sp>
+        <p:nvSpPr>
+          <p:cNvPr id="15362" name="TextBox 8"/>
+          <p:cNvSpPr txBox="1">
+            <a:spLocks noChangeArrowheads="1"/>
+          </p:cNvSpPr>
+          <p:nvPr/>
+        </p:nvSpPr>
+        <p:spPr bwMode="auto">
+          <a:xfrm>
+            <a:off x="-1" y="1618645"/>
+            <a:ext cx="12191999" cy="892552"/>
+          </a:xfrm>
+          <a:prstGeom prst="rect">
+            <a:avLst/>
+          </a:prstGeom>
+          <a:noFill/>
+          <a:ln w="9525">
+            <a:noFill/>
+            <a:miter lim="800000"/>
+            <a:headEnd/>
+            <a:tailEnd/>
+          </a:ln>
+        </p:spPr>
+        <p:txBody>
+          <a:bodyPr wrap="square">
+            <a:spAutoFit/>
+          </a:bodyPr>
+          <a:lstStyle/>
+          <a:p>
+            <a:pPr algn="ctr"/>
+            <a:r>
+              <a:rPr lang="en-US" sz="3200" b="1" u="sng" dirty="0">
+                <a:latin typeface="Arial" pitchFamily="34" charset="0"/>
+                <a:cs typeface="Arial" pitchFamily="34" charset="0"/>
+              </a:rPr>
+              <a:t>Proposed Solution</a:t>
+            </a:r>
+          </a:p>
+          <a:p>
+            <a:pPr algn="ctr"/>
+            <a:endParaRPr lang="en-US" sz="2000" u="sng" dirty="0">
+              <a:solidFill>
+                <a:schemeClr val="tx2"/>
+              </a:solidFill>
+              <a:latin typeface="Arial" pitchFamily="34" charset="0"/>
+              <a:cs typeface="Arial" pitchFamily="34" charset="0"/>
+            </a:endParaRPr>
+          </a:p>
+        </p:txBody>
+      </p:sp>
+      <p:sp>
+        <p:nvSpPr>
+          <p:cNvPr id="6" name="Slide Number Placeholder 5"/>
+          <p:cNvSpPr>
+            <a:spLocks noGrp="1"/>
+          </p:cNvSpPr>
+          <p:nvPr>
+            <p:ph type="sldNum" sz="quarter" idx="12"/>
+          </p:nvPr>
+        </p:nvSpPr>
+        <p:spPr/>
+        <p:txBody>
+          <a:bodyPr/>
+          <a:lstStyle/>
+          <a:p>
+            <a:fld id="{677C3CE7-23F7-4828-823C-E0205DF2CF97}" type="slidenum">
+              <a:rPr lang="en-US" b="1" smtClean="0">
+                <a:solidFill>
+                  <a:schemeClr val="bg1"/>
+                </a:solidFill>
+              </a:rPr>
+              <a:pPr/>
+              <a:t>2</a:t>
+            </a:fld>
+            <a:endParaRPr lang="en-US" b="1" dirty="0">
+              <a:solidFill>
+                <a:schemeClr val="bg1"/>
+              </a:solidFill>
+            </a:endParaRPr>
+          </a:p>
+        </p:txBody>
+      </p:sp>
+      <p:sp>
+        <p:nvSpPr>
+          <p:cNvPr id="7" name="Footer Placeholder 6"/>
+          <p:cNvSpPr>
+            <a:spLocks noGrp="1"/>
+          </p:cNvSpPr>
+          <p:nvPr>
+            <p:ph type="ftr" sz="quarter" idx="11"/>
+          </p:nvPr>
+        </p:nvSpPr>
+        <p:spPr>
+          <a:xfrm>
+            <a:off x="4648200" y="6356353"/>
+            <a:ext cx="3204000" cy="365125"/>
+          </a:xfrm>
+        </p:spPr>
+        <p:txBody>
+          <a:bodyPr/>
+          <a:lstStyle/>
+          <a:p>
+            <a:pPr>
+              <a:defRPr/>
+            </a:pPr>
+            <a:r>
+              <a:rPr lang="en-US">
+                <a:solidFill>
+                  <a:schemeClr val="bg1"/>
+                </a:solidFill>
+              </a:rPr>
+              <a:t>@SIH Idea submission- Template</a:t>
+            </a:r>
+            <a:endParaRPr lang="en-US" dirty="0">
+              <a:solidFill>
+                <a:schemeClr val="bg1"/>
+              </a:solidFill>
+            </a:endParaRPr>
+          </a:p>
+        </p:txBody>
+      </p:sp>
+      <p:sp>
+        <p:nvSpPr>
+          <p:cNvPr id="4" name="TextBox 3">
+            <a:extLst>
+              <a:ext uri="{FF2B5EF4-FFF2-40B4-BE49-F238E27FC236}">
+                <a16:creationId xmlns:a16="http://schemas.microsoft.com/office/drawing/2014/main" id="{372B4908-3251-1A54-2DF1-4A073EADA2AE}"/>
+              </a:ext>
+            </a:extLst>
+          </p:cNvPr>
+          <p:cNvSpPr txBox="1"/>
+          <p:nvPr/>
+        </p:nvSpPr>
+        <p:spPr>
+          <a:xfrm>
+            <a:off x="546791" y="2352166"/>
+            <a:ext cx="5214911" cy="4093428"/>
+          </a:xfrm>
+          <a:prstGeom prst="rect">
+            <a:avLst/>
+          </a:prstGeom>
+          <a:noFill/>
+        </p:spPr>
+        <p:txBody>
+          <a:bodyPr wrap="square" rtlCol="0">
+            <a:spAutoFit/>
+          </a:bodyPr>
+          <a:lstStyle/>
+          <a:p>
+            <a:r>
+              <a:rPr lang="en-IN" sz="2000" b="1" dirty="0"/>
+              <a:t>How </a:t>
+            </a:r>
+            <a:r>
+              <a:rPr lang="en-IN" sz="2000" b="1" dirty="0" err="1"/>
+              <a:t>SentinelAI</a:t>
+            </a:r>
+            <a:r>
+              <a:rPr lang="en-IN" sz="2000" b="1" dirty="0"/>
+              <a:t> Works</a:t>
+            </a:r>
+          </a:p>
+          <a:p>
+            <a:pPr marL="457200" indent="-457200">
+              <a:buFont typeface="+mj-lt"/>
+              <a:buAutoNum type="arabicPeriod"/>
+            </a:pPr>
+            <a:r>
+              <a:rPr lang="en-IN" sz="2000" dirty="0"/>
+              <a:t>Collects live telemetry from </a:t>
+            </a:r>
+            <a:r>
+              <a:rPr lang="en-IN" sz="2000" dirty="0" err="1"/>
+              <a:t>EnergyPlus</a:t>
+            </a:r>
+            <a:r>
+              <a:rPr lang="en-IN" sz="2000" dirty="0"/>
+              <a:t> </a:t>
+            </a:r>
+          </a:p>
+          <a:p>
+            <a:pPr marL="457200" indent="-457200">
+              <a:buFont typeface="+mj-lt"/>
+              <a:buAutoNum type="arabicPeriod"/>
+            </a:pPr>
+            <a:r>
+              <a:rPr lang="en-IN" sz="2000" dirty="0"/>
+              <a:t>Builds a compact building-state context </a:t>
+            </a:r>
+          </a:p>
+          <a:p>
+            <a:pPr marL="457200" indent="-457200">
+              <a:buFont typeface="+mj-lt"/>
+              <a:buAutoNum type="arabicPeriod"/>
+            </a:pPr>
+            <a:r>
+              <a:rPr lang="en-IN" sz="2000" dirty="0"/>
+              <a:t>Agent Council (LLM) optimizes: </a:t>
+            </a:r>
+          </a:p>
+          <a:p>
+            <a:pPr marL="914400" lvl="1" indent="-457200">
+              <a:buFont typeface="Arial" panose="020B0604020202020204" pitchFamily="34" charset="0"/>
+              <a:buChar char="•"/>
+            </a:pPr>
+            <a:r>
+              <a:rPr lang="en-IN" sz="2000" dirty="0"/>
+              <a:t>Energy Consumption </a:t>
+            </a:r>
+          </a:p>
+          <a:p>
+            <a:pPr marL="914400" lvl="1" indent="-457200">
+              <a:buFont typeface="Arial" panose="020B0604020202020204" pitchFamily="34" charset="0"/>
+              <a:buChar char="•"/>
+            </a:pPr>
+            <a:r>
+              <a:rPr lang="en-IN" sz="2000" dirty="0"/>
+              <a:t>Thermal Comfort </a:t>
+            </a:r>
+          </a:p>
+          <a:p>
+            <a:pPr marL="914400" lvl="1" indent="-457200">
+              <a:buFont typeface="Arial" panose="020B0604020202020204" pitchFamily="34" charset="0"/>
+              <a:buChar char="•"/>
+            </a:pPr>
+            <a:r>
+              <a:rPr lang="en-IN" sz="2000" dirty="0"/>
+              <a:t>Carbon Emissions </a:t>
+            </a:r>
+          </a:p>
+          <a:p>
+            <a:pPr marL="914400" lvl="1" indent="-457200">
+              <a:buFont typeface="Arial" panose="020B0604020202020204" pitchFamily="34" charset="0"/>
+              <a:buChar char="•"/>
+            </a:pPr>
+            <a:r>
+              <a:rPr lang="en-IN" sz="2000" dirty="0"/>
+              <a:t>Equipment Health </a:t>
+            </a:r>
+          </a:p>
+          <a:p>
+            <a:pPr marL="457200" indent="-457200">
+              <a:buFont typeface="+mj-lt"/>
+              <a:buAutoNum type="arabicPeriod"/>
+            </a:pPr>
+            <a:r>
+              <a:rPr lang="en-IN" sz="2000" dirty="0"/>
+              <a:t>Safety Validator verifies all AI decisions </a:t>
+            </a:r>
+          </a:p>
+          <a:p>
+            <a:pPr marL="457200" indent="-457200">
+              <a:buFont typeface="+mj-lt"/>
+              <a:buAutoNum type="arabicPeriod"/>
+            </a:pPr>
+            <a:r>
+              <a:rPr lang="en-IN" sz="2000" dirty="0"/>
+              <a:t>MCP Tool Server executes validated control actions </a:t>
+            </a:r>
+          </a:p>
+          <a:p>
+            <a:pPr marL="457200" indent="-457200">
+              <a:buFont typeface="+mj-lt"/>
+              <a:buAutoNum type="arabicPeriod"/>
+            </a:pPr>
+            <a:r>
+              <a:rPr lang="en-IN" sz="2000" dirty="0"/>
+              <a:t>Dashboard visualizes system performance and Digital Twin</a:t>
+            </a:r>
+          </a:p>
+        </p:txBody>
+      </p:sp>
+      <p:sp>
+        <p:nvSpPr>
+          <p:cNvPr id="5" name="TextBox 4">
+            <a:extLst>
+              <a:ext uri="{FF2B5EF4-FFF2-40B4-BE49-F238E27FC236}">
+                <a16:creationId xmlns:a16="http://schemas.microsoft.com/office/drawing/2014/main" id="{D6B5645E-493C-339E-FF2C-2A766EB36700}"/>
+              </a:ext>
+            </a:extLst>
+          </p:cNvPr>
+          <p:cNvSpPr txBox="1"/>
+          <p:nvPr/>
+        </p:nvSpPr>
+        <p:spPr>
+          <a:xfrm>
+            <a:off x="6430298" y="2352166"/>
+            <a:ext cx="5214911" cy="4401205"/>
+          </a:xfrm>
+          <a:prstGeom prst="rect">
+            <a:avLst/>
+          </a:prstGeom>
+          <a:noFill/>
+        </p:spPr>
+        <p:txBody>
+          <a:bodyPr wrap="square" rtlCol="0">
+            <a:spAutoFit/>
+          </a:bodyPr>
+          <a:lstStyle/>
+          <a:p>
+            <a:r>
+              <a:rPr lang="en-IN" sz="2000" b="1" dirty="0"/>
+              <a:t>Innovation</a:t>
+            </a:r>
+          </a:p>
+          <a:p>
+            <a:pPr marL="342900" indent="-342900">
+              <a:buFont typeface="+mj-lt"/>
+              <a:buAutoNum type="arabicPeriod"/>
+            </a:pPr>
+            <a:r>
+              <a:rPr lang="en-IN" sz="2000" dirty="0"/>
+              <a:t>Autonomous closed-loop AI control using </a:t>
+            </a:r>
+            <a:r>
+              <a:rPr lang="en-IN" sz="2000" dirty="0" err="1"/>
+              <a:t>EnergyPlus</a:t>
+            </a:r>
+            <a:r>
+              <a:rPr lang="en-IN" sz="2000" dirty="0"/>
+              <a:t>.</a:t>
+            </a:r>
+          </a:p>
+          <a:p>
+            <a:pPr marL="342900" indent="-342900">
+              <a:buFont typeface="+mj-lt"/>
+              <a:buAutoNum type="arabicPeriod"/>
+            </a:pPr>
+            <a:r>
+              <a:rPr lang="en-IN" sz="2000" dirty="0"/>
+              <a:t>Open-Source LLM-powered Agent Council.</a:t>
+            </a:r>
+          </a:p>
+          <a:p>
+            <a:pPr marL="342900" indent="-342900">
+              <a:buFont typeface="+mj-lt"/>
+              <a:buAutoNum type="arabicPeriod"/>
+            </a:pPr>
+            <a:r>
+              <a:rPr lang="en-IN" sz="2000" dirty="0"/>
+              <a:t>Model Context Protocol(MCP) tool execution.</a:t>
+            </a:r>
+          </a:p>
+          <a:p>
+            <a:pPr marL="342900" indent="-342900">
+              <a:buFont typeface="+mj-lt"/>
+              <a:buAutoNum type="arabicPeriod"/>
+            </a:pPr>
+            <a:r>
+              <a:rPr lang="en-IN" sz="2000" dirty="0"/>
+              <a:t>Safety Validator with retry and Last-Known-Good fallback.</a:t>
+            </a:r>
+          </a:p>
+          <a:p>
+            <a:pPr marL="342900" indent="-342900">
+              <a:buFont typeface="+mj-lt"/>
+              <a:buAutoNum type="arabicPeriod"/>
+            </a:pPr>
+            <a:r>
+              <a:rPr lang="en-IN" sz="2000" dirty="0"/>
+              <a:t>Rolling Context Builder for efficient LLM prompting.</a:t>
+            </a:r>
+          </a:p>
+          <a:p>
+            <a:pPr marL="342900" indent="-342900">
+              <a:buFont typeface="+mj-lt"/>
+              <a:buAutoNum type="arabicPeriod"/>
+            </a:pPr>
+            <a:r>
+              <a:rPr lang="en-IN" sz="2000" dirty="0"/>
+              <a:t>Human-in-the-Loop approval for critical actions. Interactive Dashboard with Digital Twin visualization.</a:t>
+            </a:r>
+          </a:p>
+          <a:p>
+            <a:pPr marL="342900" indent="-342900">
+              <a:buFont typeface="+mj-lt"/>
+              <a:buAutoNum type="arabicPeriod"/>
+            </a:pPr>
+            <a:r>
+              <a:rPr lang="en-IN" sz="2000" dirty="0"/>
+              <a:t>Baseline vs AI performance comparison with measurable energy savings</a:t>
+            </a:r>
+          </a:p>
+        </p:txBody>
+      </p:sp>
+    </p:spTree>
+  </p:cSld>
+  <p:clrMapOvr>
+    <a:masterClrMapping/>
+  </p:clrMapOvr>
+</p:sld>
+</file>
+
+<file path=ppt/slides/slide3.xml><?xml version="1.0" encoding="utf-8"?>
+<p:sld xmlns:a="http://schemas.openxmlformats.org/drawingml/2006/main" xmlns:r="http://schemas.openxmlformats.org/officeDocument/2006/relationships" xmlns:p="http://schemas.openxmlformats.org/presentationml/2006/main">
+  <p:cSld>
+    <p:spTree>
+      <p:nvGrpSpPr>
+        <p:cNvPr id="1" name=""/>
+        <p:cNvGrpSpPr/>
+        <p:nvPr/>
+      </p:nvGrpSpPr>
+      <p:grpSpPr>
+        <a:xfrm>
+          <a:off x="0" y="0"/>
+          <a:ext cx="0" cy="0"/>
+          <a:chOff x="0" y="0"/>
+          <a:chExt cx="0" cy="0"/>
+        </a:xfrm>
+      </p:grpSpPr>
+      <p:sp>
+        <p:nvSpPr>
+          <p:cNvPr id="17409" name="Title 1"/>
+          <p:cNvSpPr>
+            <a:spLocks noGrp="1"/>
+          </p:cNvSpPr>
+          <p:nvPr>
+            <p:ph type="title"/>
+          </p:nvPr>
+        </p:nvSpPr>
+        <p:spPr/>
+        <p:txBody>
+          <a:bodyPr/>
+          <a:lstStyle/>
+          <a:p>
+            <a:pPr eaLnBrk="1" hangingPunct="1"/>
+            <a:r>
+              <a:rPr lang="en-US" sz="3600" b="1" dirty="0">
+                <a:latin typeface="Times New Roman" panose="02020603050405020304" pitchFamily="18" charset="0"/>
+                <a:ea typeface="ＭＳ Ｐゴシック" pitchFamily="1" charset="-128"/>
+                <a:cs typeface="Times New Roman" panose="02020603050405020304" pitchFamily="18" charset="0"/>
+              </a:rPr>
+              <a:t>TECHNICAL APPROACH</a:t>
+            </a:r>
+          </a:p>
+        </p:txBody>
+      </p:sp>
+      <p:sp>
+        <p:nvSpPr>
+          <p:cNvPr id="2" name="Content Placeholder 1">
+            <a:extLst>
+              <a:ext uri="{FF2B5EF4-FFF2-40B4-BE49-F238E27FC236}">
+                <a16:creationId xmlns:a16="http://schemas.microsoft.com/office/drawing/2014/main" id="{DF2AE3FA-B81C-68E0-A005-CA0CA4A6EDF8}"/>
+              </a:ext>
+            </a:extLst>
+          </p:cNvPr>
+          <p:cNvSpPr>
+            <a:spLocks noGrp="1"/>
+          </p:cNvSpPr>
+          <p:nvPr>
+            <p:ph sz="half" idx="1"/>
+          </p:nvPr>
+        </p:nvSpPr>
+        <p:spPr>
+          <a:xfrm>
+            <a:off x="609600" y="1244603"/>
+            <a:ext cx="5384800" cy="4525963"/>
+          </a:xfrm>
+        </p:spPr>
+        <p:txBody>
+          <a:bodyPr/>
+          <a:lstStyle/>
+          <a:p>
+            <a:pPr marL="0" indent="0" algn="ctr">
+              <a:buNone/>
+            </a:pPr>
+            <a:r>
+              <a:rPr lang="en-IN" b="1" dirty="0"/>
+              <a:t>Technologies Used</a:t>
+            </a:r>
+          </a:p>
+          <a:p>
+            <a:pPr marL="0" indent="0">
+              <a:buNone/>
+            </a:pPr>
+            <a:r>
+              <a:rPr lang="en-IN" sz="1800" b="1" dirty="0"/>
+              <a:t>Simulation &amp; AI</a:t>
+            </a:r>
+          </a:p>
+          <a:p>
+            <a:r>
+              <a:rPr lang="en-IN" sz="1800" dirty="0" err="1"/>
+              <a:t>EnergyPlus</a:t>
+            </a:r>
+            <a:r>
+              <a:rPr lang="en-IN" sz="1800" dirty="0"/>
+              <a:t> </a:t>
+            </a:r>
+          </a:p>
+          <a:p>
+            <a:r>
+              <a:rPr lang="en-IN" sz="1800" dirty="0" err="1"/>
+              <a:t>PyEnergyPlus</a:t>
+            </a:r>
+            <a:r>
+              <a:rPr lang="en-IN" sz="1800" dirty="0"/>
+              <a:t> API </a:t>
+            </a:r>
+          </a:p>
+          <a:p>
+            <a:r>
+              <a:rPr lang="en-IN" sz="1800" dirty="0"/>
+              <a:t>Open-Source LLM (via </a:t>
+            </a:r>
+            <a:r>
+              <a:rPr lang="en-IN" sz="1800" dirty="0" err="1"/>
+              <a:t>Ollama</a:t>
+            </a:r>
+            <a:r>
+              <a:rPr lang="en-IN" sz="1800" dirty="0"/>
+              <a:t> API) </a:t>
+            </a:r>
+          </a:p>
+          <a:p>
+            <a:r>
+              <a:rPr lang="en-IN" sz="1800" dirty="0"/>
+              <a:t>Model Context Protocol (MCP) </a:t>
+            </a:r>
+          </a:p>
+          <a:p>
+            <a:pPr marL="0" indent="0">
+              <a:buNone/>
+            </a:pPr>
+            <a:r>
+              <a:rPr lang="en-IN" sz="1800" b="1" dirty="0"/>
+              <a:t>Backend</a:t>
+            </a:r>
+          </a:p>
+          <a:p>
+            <a:r>
+              <a:rPr lang="en-IN" sz="1800" dirty="0"/>
+              <a:t>Python </a:t>
+            </a:r>
+          </a:p>
+          <a:p>
+            <a:r>
+              <a:rPr lang="en-IN" sz="1800" dirty="0" err="1"/>
+              <a:t>FastAPI</a:t>
+            </a:r>
+            <a:r>
+              <a:rPr lang="en-IN" sz="1800" dirty="0"/>
+              <a:t> </a:t>
+            </a:r>
+          </a:p>
+          <a:p>
+            <a:r>
+              <a:rPr lang="en-IN" sz="1800" dirty="0"/>
+              <a:t>SQLite </a:t>
+            </a:r>
+          </a:p>
+          <a:p>
+            <a:pPr marL="0" indent="0">
+              <a:buNone/>
+            </a:pPr>
+            <a:r>
+              <a:rPr lang="en-IN" sz="1800" b="1" dirty="0"/>
+              <a:t>Frontend</a:t>
+            </a:r>
+          </a:p>
+          <a:p>
+            <a:r>
+              <a:rPr lang="en-IN" sz="1800" dirty="0"/>
+              <a:t>HTML/CSS/JavaScript </a:t>
+            </a:r>
+          </a:p>
+          <a:p>
+            <a:r>
+              <a:rPr lang="en-IN" sz="1800" dirty="0" err="1"/>
+              <a:t>Plotly</a:t>
+            </a:r>
+            <a:r>
+              <a:rPr lang="en-IN" sz="1800" dirty="0"/>
+              <a:t> </a:t>
+            </a:r>
+          </a:p>
+          <a:p>
+            <a:r>
+              <a:rPr lang="en-IN" sz="1800" dirty="0"/>
+              <a:t>SVG Digital Twin </a:t>
+            </a:r>
+          </a:p>
+          <a:p>
+            <a:pPr marL="0" indent="0">
+              <a:buNone/>
+            </a:pPr>
+            <a:endParaRPr lang="en-IN" sz="2400" dirty="0"/>
+          </a:p>
+        </p:txBody>
+      </p:sp>
+      <p:sp>
+        <p:nvSpPr>
+          <p:cNvPr id="3" name="Content Placeholder 2">
+            <a:extLst>
+              <a:ext uri="{FF2B5EF4-FFF2-40B4-BE49-F238E27FC236}">
+                <a16:creationId xmlns:a16="http://schemas.microsoft.com/office/drawing/2014/main" id="{ED8B8002-E935-40D9-4880-524049BD7D11}"/>
+              </a:ext>
+            </a:extLst>
+          </p:cNvPr>
+          <p:cNvSpPr>
+            <a:spLocks noGrp="1"/>
+          </p:cNvSpPr>
+          <p:nvPr>
+            <p:ph sz="half" idx="2"/>
+          </p:nvPr>
+        </p:nvSpPr>
+        <p:spPr>
+          <a:xfrm>
+            <a:off x="6197602" y="1244603"/>
+            <a:ext cx="5384800" cy="4525963"/>
+          </a:xfrm>
+        </p:spPr>
+        <p:txBody>
+          <a:bodyPr/>
+          <a:lstStyle/>
+          <a:p>
+            <a:pPr marL="0" indent="0" algn="ctr">
+              <a:buNone/>
+            </a:pPr>
+            <a:r>
+              <a:rPr lang="en-IN" b="1" dirty="0"/>
+              <a:t>Architecture</a:t>
+            </a:r>
+          </a:p>
+          <a:p>
+            <a:pPr marL="0" indent="0" algn="ctr">
+              <a:buNone/>
+            </a:pPr>
+            <a:endParaRPr lang="en-IN" b="1" dirty="0"/>
+          </a:p>
+        </p:txBody>
+      </p:sp>
+      <p:sp>
+        <p:nvSpPr>
+          <p:cNvPr id="7" name="Footer Placeholder 6"/>
+          <p:cNvSpPr>
+            <a:spLocks noGrp="1"/>
+          </p:cNvSpPr>
+          <p:nvPr>
+            <p:ph type="ftr" sz="quarter" idx="11"/>
+          </p:nvPr>
+        </p:nvSpPr>
+        <p:spPr/>
+        <p:txBody>
+          <a:bodyPr/>
+          <a:lstStyle/>
+          <a:p>
+            <a:pPr>
+              <a:defRPr/>
+            </a:pPr>
+            <a:r>
+              <a:rPr lang="en-US">
+                <a:solidFill>
+                  <a:schemeClr val="bg1"/>
+                </a:solidFill>
+              </a:rPr>
+              <a:t>@SIH Idea submission- Template</a:t>
+            </a:r>
+            <a:endParaRPr lang="en-US" dirty="0">
+              <a:solidFill>
+                <a:schemeClr val="bg1"/>
+              </a:solidFill>
+            </a:endParaRPr>
+          </a:p>
+        </p:txBody>
+      </p:sp>
+      <p:sp>
+        <p:nvSpPr>
+          <p:cNvPr id="6" name="Slide Number Placeholder 5"/>
+          <p:cNvSpPr>
+            <a:spLocks noGrp="1"/>
+          </p:cNvSpPr>
+          <p:nvPr>
+            <p:ph type="sldNum" sz="quarter" idx="12"/>
+          </p:nvPr>
+        </p:nvSpPr>
+        <p:spPr/>
+        <p:txBody>
+          <a:bodyPr/>
+          <a:lstStyle/>
+          <a:p>
+            <a:fld id="{677C3CE7-23F7-4828-823C-E0205DF2CF97}" type="slidenum">
+              <a:rPr lang="en-US" b="1">
+                <a:solidFill>
+                  <a:schemeClr val="bg1"/>
+                </a:solidFill>
+              </a:rPr>
+              <a:pPr/>
+              <a:t>3</a:t>
+            </a:fld>
+            <a:endParaRPr lang="en-US" b="1" dirty="0">
+              <a:solidFill>
+                <a:schemeClr val="bg1"/>
+              </a:solidFill>
+            </a:endParaRPr>
+          </a:p>
+        </p:txBody>
+      </p:sp>
+      <p:pic>
+        <p:nvPicPr>
+          <p:cNvPr id="9" name="Picture 8">
+            <a:extLst>
+              <a:ext uri="{FF2B5EF4-FFF2-40B4-BE49-F238E27FC236}">
+                <a16:creationId xmlns:a16="http://schemas.microsoft.com/office/drawing/2014/main" id="{2CA37BCD-ED84-E38E-113F-A1D2095142EB}"/>
+              </a:ext>
+            </a:extLst>
+          </p:cNvPr>
+          <p:cNvPicPr>
+            <a:picLocks noChangeAspect="1"/>
+          </p:cNvPicPr>
+          <p:nvPr/>
+        </p:nvPicPr>
+        <p:blipFill>
+          <a:blip r:embed="rId3"/>
+          <a:stretch>
+            <a:fillRect/>
+          </a:stretch>
+        </p:blipFill>
+        <p:spPr>
+          <a:xfrm>
+            <a:off x="5219700" y="1890715"/>
+            <a:ext cx="6972300" cy="4648200"/>
+          </a:xfrm>
+          <a:prstGeom prst="rect">
+            <a:avLst/>
+          </a:prstGeom>
+        </p:spPr>
+      </p:pic>
+    </p:spTree>
+  </p:cSld>
+  <p:clrMapOvr>
+    <a:masterClrMapping/>
+  </p:clrMapOvr>
+</p:sld>
+</file>
+
+<file path=ppt/slides/slide4.xml><?xml version="1.0" encoding="utf-8"?>
+<p:sld xmlns:a="http://schemas.openxmlformats.org/drawingml/2006/main" xmlns:r="http://schemas.openxmlformats.org/officeDocument/2006/relationships" xmlns:p="http://schemas.openxmlformats.org/presentationml/2006/main">
+  <p:cSld>
+    <p:spTree>
+      <p:nvGrpSpPr>
+        <p:cNvPr id="1" name=""/>
+        <p:cNvGrpSpPr/>
+        <p:nvPr/>
+      </p:nvGrpSpPr>
+      <p:grpSpPr>
+        <a:xfrm>
+          <a:off x="0" y="0"/>
+          <a:ext cx="0" cy="0"/>
+          <a:chOff x="0" y="0"/>
+          <a:chExt cx="0" cy="0"/>
+        </a:xfrm>
+      </p:grpSpPr>
+      <p:sp>
+        <p:nvSpPr>
+          <p:cNvPr id="17409" name="Title 1"/>
+          <p:cNvSpPr>
+            <a:spLocks noGrp="1"/>
+          </p:cNvSpPr>
+          <p:nvPr>
+            <p:ph type="title"/>
+          </p:nvPr>
+        </p:nvSpPr>
+        <p:spPr/>
+        <p:txBody>
+          <a:bodyPr/>
+          <a:lstStyle/>
+          <a:p>
+            <a:pPr eaLnBrk="1" hangingPunct="1"/>
+            <a:r>
+              <a:rPr lang="en-US" sz="3600" b="1" dirty="0">
+                <a:latin typeface="Times New Roman" panose="02020603050405020304" pitchFamily="18" charset="0"/>
+                <a:ea typeface="ＭＳ Ｐゴシック" pitchFamily="1" charset="-128"/>
+                <a:cs typeface="Times New Roman" panose="02020603050405020304" pitchFamily="18" charset="0"/>
+              </a:rPr>
+              <a:t>FEASIBILITY AND VIABILITY</a:t>
+            </a:r>
+          </a:p>
+        </p:txBody>
+      </p:sp>
+      <p:sp>
+        <p:nvSpPr>
           <p:cNvPr id="6" name="Slide Number Placeholder 5"/>
           <p:cNvSpPr>
             <a:spLocks noGrp="1"/>
@@ -4924,7 +6058,7 @@
                 <a:tabLst/>
                 <a:defRPr/>
               </a:pPr>
-              <a:t>1</a:t>
+              <a:t>4</a:t>
             </a:fld>
             <a:endParaRPr kumimoji="0" lang="en-US" sz="1200" b="1" i="0" u="none" strike="noStrike" kern="1200" cap="none" spc="0" normalizeH="0" baseline="0" noProof="0" dirty="0">
               <a:ln>
@@ -5016,68 +6150,20 @@
       </p:sp>
       <p:sp>
         <p:nvSpPr>
-          <p:cNvPr id="12" name="Google Shape;100;p3"/>
+          <p:cNvPr id="2" name="TextBox 1">
+            <a:extLst>
+              <a:ext uri="{FF2B5EF4-FFF2-40B4-BE49-F238E27FC236}">
+                <a16:creationId xmlns:a16="http://schemas.microsoft.com/office/drawing/2014/main" id="{113F64FD-7DA2-13FF-098C-218D16013F20}"/>
+              </a:ext>
+            </a:extLst>
+          </p:cNvPr>
           <p:cNvSpPr txBox="1"/>
           <p:nvPr/>
         </p:nvSpPr>
         <p:spPr>
           <a:xfrm>
-            <a:off x="367832" y="1915454"/>
-            <a:ext cx="11764736" cy="4070356"/>
-          </a:xfrm>
-          <a:prstGeom prst="rect">
-            <a:avLst/>
-          </a:prstGeom>
-          <a:noFill/>
-          <a:ln>
-            <a:noFill/>
-          </a:ln>
-        </p:spPr>
-        <p:txBody>
-          <a:bodyPr spcFirstLastPara="1" wrap="square" lIns="91425" tIns="45700" rIns="91425" bIns="45700" anchor="t" anchorCtr="0">
-            <a:noAutofit/>
-          </a:bodyPr>
-          <a:lstStyle/>
-          <a:p>
-            <a:pPr marL="914400" marR="0" lvl="1" indent="-316230" algn="just" rtl="0">
-              <a:lnSpc>
-                <a:spcPct val="90000"/>
-              </a:lnSpc>
-              <a:spcBef>
-                <a:spcPts val="500"/>
-              </a:spcBef>
-              <a:spcAft>
-                <a:spcPts val="0"/>
-              </a:spcAft>
-              <a:buClr>
-                <a:schemeClr val="dk1"/>
-              </a:buClr>
-              <a:buSzPct val="100000"/>
-              <a:buFont typeface="Calibri"/>
-              <a:buNone/>
-            </a:pPr>
-            <a:endParaRPr sz="2000" b="1" i="0" u="none" strike="noStrike" cap="none" dirty="0">
-              <a:solidFill>
-                <a:schemeClr val="dk1"/>
-              </a:solidFill>
-              <a:latin typeface="Arial" panose="020B0604020202020204" pitchFamily="34" charset="0"/>
-              <a:ea typeface="Calibri"/>
-              <a:cs typeface="Arial" panose="020B0604020202020204" pitchFamily="34" charset="0"/>
-              <a:sym typeface="Calibri"/>
-            </a:endParaRPr>
-          </a:p>
-        </p:txBody>
-      </p:sp>
-      <p:sp>
-        <p:nvSpPr>
-          <p:cNvPr id="4" name="TextBox 3"/>
-          <p:cNvSpPr txBox="1"/>
-          <p:nvPr/>
-        </p:nvSpPr>
-        <p:spPr>
-          <a:xfrm>
-            <a:off x="1393371" y="107066"/>
-            <a:ext cx="8410540" cy="646331"/>
+            <a:off x="51541" y="1366897"/>
+            <a:ext cx="3926840" cy="4585871"/>
           </a:xfrm>
           <a:prstGeom prst="rect">
             <a:avLst/>
@@ -5092,29 +6178,104 @@
           <a:p>
             <a:pPr algn="ctr"/>
             <a:r>
-              <a:rPr lang="en-US" sz="3600" b="1" dirty="0">
-                <a:latin typeface="Times New Roman" panose="02020603050405020304" pitchFamily="18" charset="0"/>
-                <a:cs typeface="Times New Roman" panose="02020603050405020304" pitchFamily="18" charset="0"/>
-              </a:rPr>
-              <a:t>IMPORTANT INSTRUCTIONS</a:t>
-            </a:r>
-            <a:endParaRPr lang="en-IN" sz="3600" b="1" dirty="0">
-              <a:latin typeface="Times New Roman" panose="02020603050405020304" pitchFamily="18" charset="0"/>
-              <a:cs typeface="Times New Roman" panose="02020603050405020304" pitchFamily="18" charset="0"/>
-            </a:endParaRPr>
-          </a:p>
-        </p:txBody>
-      </p:sp>
-      <p:sp>
-        <p:nvSpPr>
-          <p:cNvPr id="5" name="TextBox 4"/>
+              <a:rPr lang="en-IN" sz="2000" b="1" dirty="0"/>
+              <a:t>Feasibility</a:t>
+            </a:r>
+          </a:p>
+          <a:p>
+            <a:pPr algn="ctr"/>
+            <a:endParaRPr lang="en-IN" sz="2000" b="1" dirty="0"/>
+          </a:p>
+          <a:p>
+            <a:pPr marL="285750" indent="-285750" algn="just">
+              <a:buFont typeface="Arial" panose="020B0604020202020204" pitchFamily="34" charset="0"/>
+              <a:buChar char="•"/>
+            </a:pPr>
+            <a:r>
+              <a:rPr lang="en-IN" b="1" dirty="0"/>
+              <a:t>Industry-Standard Foundation:</a:t>
+            </a:r>
+            <a:r>
+              <a:rPr lang="en-IN" dirty="0"/>
+              <a:t> Built on </a:t>
+            </a:r>
+            <a:r>
+              <a:rPr lang="en-IN" dirty="0" err="1"/>
+              <a:t>EnergyPlus</a:t>
+            </a:r>
+            <a:r>
+              <a:rPr lang="en-IN" dirty="0"/>
+              <a:t>, Python, </a:t>
+            </a:r>
+            <a:r>
+              <a:rPr lang="en-IN" dirty="0" err="1"/>
+              <a:t>FastAPI</a:t>
+            </a:r>
+            <a:r>
+              <a:rPr lang="en-IN" dirty="0"/>
+              <a:t>, and open-source LLMs. </a:t>
+            </a:r>
+          </a:p>
+          <a:p>
+            <a:pPr marL="285750" indent="-285750" algn="just">
+              <a:buFont typeface="Arial" panose="020B0604020202020204" pitchFamily="34" charset="0"/>
+              <a:buChar char="•"/>
+            </a:pPr>
+            <a:r>
+              <a:rPr lang="en-IN" b="1" dirty="0"/>
+              <a:t>Real-Time Closed-Loop Control:</a:t>
+            </a:r>
+            <a:r>
+              <a:rPr lang="en-IN" dirty="0"/>
+              <a:t> Continuously monitors building telemetry and applies validated control actions.</a:t>
+            </a:r>
+          </a:p>
+          <a:p>
+            <a:pPr marL="285750" indent="-285750" algn="just">
+              <a:buFont typeface="Arial" panose="020B0604020202020204" pitchFamily="34" charset="0"/>
+              <a:buChar char="•"/>
+            </a:pPr>
+            <a:r>
+              <a:rPr lang="en-IN" b="1" dirty="0"/>
+              <a:t>Modular &amp; Scalable:</a:t>
+            </a:r>
+            <a:r>
+              <a:rPr lang="en-IN" dirty="0"/>
+              <a:t> Components (AI engine, dashboard, control layer) can be deployed independently and extended to larger buildings.</a:t>
+            </a:r>
+          </a:p>
+          <a:p>
+            <a:pPr marL="285750" indent="-285750" algn="just">
+              <a:buFont typeface="Arial" panose="020B0604020202020204" pitchFamily="34" charset="0"/>
+              <a:buChar char="•"/>
+            </a:pPr>
+            <a:r>
+              <a:rPr lang="en-IN" b="1" dirty="0"/>
+              <a:t>Cost-Effective:</a:t>
+            </a:r>
+            <a:r>
+              <a:rPr lang="en-IN" dirty="0"/>
+              <a:t> Uses open-source technologies, reducing deployment and licensing costs.</a:t>
+            </a:r>
+          </a:p>
+        </p:txBody>
+      </p:sp>
+      <p:sp>
+        <p:nvSpPr>
+          <p:cNvPr id="4" name="TextBox 3">
+            <a:extLst>
+              <a:ext uri="{FF2B5EF4-FFF2-40B4-BE49-F238E27FC236}">
+                <a16:creationId xmlns:a16="http://schemas.microsoft.com/office/drawing/2014/main" id="{34DDAD6A-9FD5-2289-AA79-8EF7D987F591}"/>
+              </a:ext>
+            </a:extLst>
+          </p:cNvPr>
           <p:cNvSpPr txBox="1"/>
           <p:nvPr/>
         </p:nvSpPr>
         <p:spPr>
           <a:xfrm>
-            <a:off x="602343" y="1181900"/>
-            <a:ext cx="9557657" cy="341632"/>
+            <a:off x="4132580" y="1352034"/>
+            <a:ext cx="3926840" cy="2062103"/>
           </a:xfrm>
           <a:prstGeom prst="rect">
             <a:avLst/>
@@ -5127,49 +6288,72 @@
           </a:bodyPr>
           <a:lstStyle/>
           <a:p>
-            <a:pPr algn="just">
-              <a:lnSpc>
-                <a:spcPct val="90000"/>
-              </a:lnSpc>
-              <a:spcBef>
-                <a:spcPts val="1000"/>
-              </a:spcBef>
-              <a:spcAft>
-                <a:spcPts val="0"/>
-              </a:spcAft>
-              <a:buClr>
-                <a:schemeClr val="dk1"/>
-              </a:buClr>
-              <a:buSzPct val="100000"/>
+            <a:pPr algn="ctr"/>
+            <a:r>
+              <a:rPr lang="en-IN" sz="2000" b="1" dirty="0"/>
+              <a:t>Potential Challenges and Risks</a:t>
+            </a:r>
+          </a:p>
+          <a:p>
+            <a:endParaRPr lang="en-IN" b="1" dirty="0"/>
+          </a:p>
+          <a:p>
+            <a:pPr marL="285750" indent="-285750" algn="just">
+              <a:buFont typeface="Arial" panose="020B0604020202020204" pitchFamily="34" charset="0"/>
+              <a:buChar char="•"/>
             </a:pPr>
             <a:r>
-              <a:rPr lang="en-US" b="1" dirty="0">
-                <a:solidFill>
-                  <a:schemeClr val="dk1"/>
-                </a:solidFill>
-                <a:latin typeface="Arial" panose="020B0604020202020204" pitchFamily="34" charset="0"/>
-                <a:ea typeface="Calibri"/>
-                <a:cs typeface="Arial" panose="020B0604020202020204" pitchFamily="34" charset="0"/>
-              </a:rPr>
-              <a:t>Please ensure below pointers are met while submitting the Idea PPT:</a:t>
-            </a:r>
-            <a:endParaRPr lang="en-IN" b="1" dirty="0">
-              <a:solidFill>
-                <a:schemeClr val="dk1"/>
-              </a:solidFill>
-              <a:latin typeface="Arial" panose="020B0604020202020204" pitchFamily="34" charset="0"/>
-              <a:ea typeface="Calibri"/>
-              <a:cs typeface="Arial" panose="020B0604020202020204" pitchFamily="34" charset="0"/>
-            </a:endParaRPr>
-          </a:p>
-        </p:txBody>
-      </p:sp>
-      <p:sp>
-        <p:nvSpPr>
-          <p:cNvPr id="9" name="TextBox 8">
+              <a:rPr lang="en-IN" dirty="0"/>
+              <a:t>AI-generated unsafe control actions.</a:t>
+            </a:r>
+          </a:p>
+          <a:p>
+            <a:pPr marL="285750" indent="-285750" algn="just">
+              <a:buFont typeface="Arial" panose="020B0604020202020204" pitchFamily="34" charset="0"/>
+              <a:buChar char="•"/>
+            </a:pPr>
+            <a:r>
+              <a:rPr lang="en-IN" dirty="0"/>
+              <a:t>Large </a:t>
+            </a:r>
+            <a:r>
+              <a:rPr lang="en-IN" dirty="0" err="1"/>
+              <a:t>EnergyPlus</a:t>
+            </a:r>
+            <a:r>
+              <a:rPr lang="en-IN" dirty="0"/>
+              <a:t> simulation logs.</a:t>
+            </a:r>
+          </a:p>
+          <a:p>
+            <a:pPr marL="285750" indent="-285750" algn="just">
+              <a:buFont typeface="Arial" panose="020B0604020202020204" pitchFamily="34" charset="0"/>
+              <a:buChar char="•"/>
+            </a:pPr>
+            <a:r>
+              <a:rPr lang="en-IN" dirty="0"/>
+              <a:t>LLM response latency.</a:t>
+            </a:r>
+          </a:p>
+          <a:p>
+            <a:pPr marL="285750" indent="-285750" algn="just">
+              <a:buFont typeface="Arial" panose="020B0604020202020204" pitchFamily="34" charset="0"/>
+              <a:buChar char="•"/>
+            </a:pPr>
+            <a:r>
+              <a:rPr lang="en-IN" dirty="0"/>
+              <a:t>Balancing energy efficiency with occupant comfort</a:t>
+            </a:r>
+            <a:endParaRPr lang="en-IN" b="1" dirty="0"/>
+          </a:p>
+        </p:txBody>
+      </p:sp>
+      <p:sp>
+        <p:nvSpPr>
+          <p:cNvPr id="8" name="TextBox 7">
             <a:extLst>
               <a:ext uri="{FF2B5EF4-FFF2-40B4-BE49-F238E27FC236}">
-                <a16:creationId xmlns:a16="http://schemas.microsoft.com/office/drawing/2014/main" id="{327CE727-C45C-A6F5-9EE5-AF363B2ADA27}"/>
+                <a16:creationId xmlns:a16="http://schemas.microsoft.com/office/drawing/2014/main" id="{3B078D8B-B278-1D53-6747-D0721E79669F}"/>
               </a:ext>
             </a:extLst>
           </p:cNvPr>
@@ -5178,8 +6362,8 @@
         </p:nvSpPr>
         <p:spPr>
           <a:xfrm>
-            <a:off x="602343" y="1714078"/>
-            <a:ext cx="10397765" cy="4073423"/>
+            <a:off x="8196580" y="1366897"/>
+            <a:ext cx="3926840" cy="4278094"/>
           </a:xfrm>
           <a:prstGeom prst="rect">
             <a:avLst/>
@@ -5187,1273 +6371,84 @@
           <a:noFill/>
         </p:spPr>
         <p:txBody>
-          <a:bodyPr wrap="square">
-            <a:spAutoFit/>
-          </a:bodyPr>
-          <a:lstStyle/>
-          <a:p>
-            <a:pPr marL="514350" marR="0" lvl="0" indent="-514350" algn="just" rtl="0">
-              <a:lnSpc>
-                <a:spcPct val="90000"/>
-              </a:lnSpc>
-              <a:spcBef>
-                <a:spcPts val="0"/>
-              </a:spcBef>
-              <a:spcAft>
-                <a:spcPts val="0"/>
-              </a:spcAft>
-              <a:buClr>
-                <a:schemeClr val="dk1"/>
-              </a:buClr>
-              <a:buSzPct val="100000"/>
-              <a:buFont typeface="Calibri"/>
-              <a:buAutoNum type="arabicPeriod"/>
-            </a:pPr>
-            <a:r>
-              <a:rPr lang="en-US" b="1" i="0" u="none" strike="noStrike" cap="none" dirty="0">
-                <a:solidFill>
-                  <a:schemeClr val="dk1"/>
-                </a:solidFill>
-                <a:latin typeface="Arial" panose="020B0604020202020204" pitchFamily="34" charset="0"/>
-                <a:ea typeface="Calibri"/>
-                <a:cs typeface="Arial" panose="020B0604020202020204" pitchFamily="34" charset="0"/>
-                <a:sym typeface="Calibri"/>
-              </a:rPr>
-              <a:t>Kindly keep the maximum slides limit up to six </a:t>
-            </a:r>
-            <a:r>
-              <a:rPr lang="en-US" b="1" i="0" u="none" strike="noStrike" cap="none" dirty="0">
-                <a:solidFill>
-                  <a:srgbClr val="C00000"/>
-                </a:solidFill>
-                <a:latin typeface="Arial" panose="020B0604020202020204" pitchFamily="34" charset="0"/>
-                <a:ea typeface="Calibri"/>
-                <a:cs typeface="Arial" panose="020B0604020202020204" pitchFamily="34" charset="0"/>
-                <a:sym typeface="Calibri"/>
-              </a:rPr>
-              <a:t>(6). </a:t>
-            </a:r>
-            <a:r>
-              <a:rPr lang="en-US" b="1" i="0" u="none" strike="noStrike" cap="none" dirty="0">
-                <a:solidFill>
-                  <a:schemeClr val="dk1"/>
-                </a:solidFill>
-                <a:latin typeface="Arial" panose="020B0604020202020204" pitchFamily="34" charset="0"/>
-                <a:ea typeface="Calibri"/>
-                <a:cs typeface="Arial" panose="020B0604020202020204" pitchFamily="34" charset="0"/>
-                <a:sym typeface="Calibri"/>
-              </a:rPr>
-              <a:t>( Including the title slide) </a:t>
-            </a:r>
-            <a:endParaRPr lang="en-US" b="1" dirty="0">
-              <a:latin typeface="Arial" panose="020B0604020202020204" pitchFamily="34" charset="0"/>
-              <a:cs typeface="Arial" panose="020B0604020202020204" pitchFamily="34" charset="0"/>
-            </a:endParaRPr>
-          </a:p>
-          <a:p>
-            <a:pPr marL="514350" marR="0" lvl="0" indent="-514350" algn="just" rtl="0">
-              <a:lnSpc>
-                <a:spcPct val="90000"/>
-              </a:lnSpc>
-              <a:spcBef>
-                <a:spcPts val="1000"/>
-              </a:spcBef>
-              <a:spcAft>
-                <a:spcPts val="0"/>
-              </a:spcAft>
-              <a:buClr>
-                <a:schemeClr val="dk1"/>
-              </a:buClr>
-              <a:buSzPct val="100000"/>
-              <a:buFont typeface="Calibri"/>
-              <a:buAutoNum type="arabicPeriod"/>
-            </a:pPr>
-            <a:r>
-              <a:rPr lang="en-US" b="1" i="0" u="none" strike="noStrike" cap="none" dirty="0">
-                <a:solidFill>
-                  <a:schemeClr val="dk1"/>
-                </a:solidFill>
-                <a:latin typeface="Arial" panose="020B0604020202020204" pitchFamily="34" charset="0"/>
-                <a:ea typeface="Calibri"/>
-                <a:cs typeface="Arial" panose="020B0604020202020204" pitchFamily="34" charset="0"/>
-                <a:sym typeface="Calibri"/>
-              </a:rPr>
-              <a:t>Try to avoid paragraphs and post your idea in points /diagrams / Infographics /pictures </a:t>
-            </a:r>
-            <a:endParaRPr lang="en-US" b="1" dirty="0">
-              <a:latin typeface="Arial" panose="020B0604020202020204" pitchFamily="34" charset="0"/>
-              <a:cs typeface="Arial" panose="020B0604020202020204" pitchFamily="34" charset="0"/>
-            </a:endParaRPr>
-          </a:p>
-          <a:p>
-            <a:pPr marL="514350" marR="0" lvl="0" indent="-514350" algn="just" rtl="0">
-              <a:lnSpc>
-                <a:spcPct val="90000"/>
-              </a:lnSpc>
-              <a:spcBef>
-                <a:spcPts val="1000"/>
-              </a:spcBef>
-              <a:spcAft>
-                <a:spcPts val="0"/>
-              </a:spcAft>
-              <a:buClr>
-                <a:schemeClr val="dk1"/>
-              </a:buClr>
-              <a:buSzPct val="100000"/>
-              <a:buFont typeface="Calibri"/>
-              <a:buAutoNum type="arabicPeriod"/>
-            </a:pPr>
-            <a:r>
-              <a:rPr lang="en-US" b="1" i="0" u="none" strike="noStrike" cap="none" dirty="0">
-                <a:solidFill>
-                  <a:schemeClr val="dk1"/>
-                </a:solidFill>
-                <a:latin typeface="Arial" panose="020B0604020202020204" pitchFamily="34" charset="0"/>
-                <a:ea typeface="Calibri"/>
-                <a:cs typeface="Arial" panose="020B0604020202020204" pitchFamily="34" charset="0"/>
-                <a:sym typeface="Calibri"/>
-              </a:rPr>
-              <a:t>Keep your explanation precise and easy to understand</a:t>
-            </a:r>
-            <a:endParaRPr lang="en-US" b="1" dirty="0">
-              <a:latin typeface="Arial" panose="020B0604020202020204" pitchFamily="34" charset="0"/>
-              <a:cs typeface="Arial" panose="020B0604020202020204" pitchFamily="34" charset="0"/>
-            </a:endParaRPr>
-          </a:p>
-          <a:p>
-            <a:pPr marL="514350" marR="0" lvl="0" indent="-514350" algn="just" rtl="0">
-              <a:lnSpc>
-                <a:spcPct val="90000"/>
-              </a:lnSpc>
-              <a:spcBef>
-                <a:spcPts val="1000"/>
-              </a:spcBef>
-              <a:spcAft>
-                <a:spcPts val="0"/>
-              </a:spcAft>
-              <a:buClr>
-                <a:schemeClr val="dk1"/>
-              </a:buClr>
-              <a:buSzPct val="100000"/>
-              <a:buFont typeface="Calibri"/>
-              <a:buAutoNum type="arabicPeriod"/>
-            </a:pPr>
-            <a:r>
-              <a:rPr lang="en-US" b="1" i="0" u="none" strike="noStrike" cap="none" dirty="0">
-                <a:solidFill>
-                  <a:schemeClr val="dk1"/>
-                </a:solidFill>
-                <a:latin typeface="Arial" panose="020B0604020202020204" pitchFamily="34" charset="0"/>
-                <a:ea typeface="Calibri"/>
-                <a:cs typeface="Arial" panose="020B0604020202020204" pitchFamily="34" charset="0"/>
-                <a:sym typeface="Calibri"/>
-              </a:rPr>
-              <a:t>Idea should be unique and novel. </a:t>
-            </a:r>
-            <a:endParaRPr lang="en-US" b="1" dirty="0">
-              <a:latin typeface="Arial" panose="020B0604020202020204" pitchFamily="34" charset="0"/>
-              <a:cs typeface="Arial" panose="020B0604020202020204" pitchFamily="34" charset="0"/>
-            </a:endParaRPr>
-          </a:p>
-          <a:p>
-            <a:pPr marL="514350" marR="0" lvl="0" indent="-514350" algn="just" rtl="0">
-              <a:lnSpc>
-                <a:spcPct val="90000"/>
-              </a:lnSpc>
-              <a:spcBef>
-                <a:spcPts val="1000"/>
-              </a:spcBef>
-              <a:spcAft>
-                <a:spcPts val="0"/>
-              </a:spcAft>
-              <a:buClr>
-                <a:schemeClr val="dk1"/>
-              </a:buClr>
-              <a:buSzPct val="100000"/>
-              <a:buFont typeface="Calibri"/>
-              <a:buAutoNum type="arabicPeriod"/>
-            </a:pPr>
-            <a:r>
-              <a:rPr lang="en-US" b="1" i="0" u="none" strike="noStrike" cap="none" dirty="0">
-                <a:solidFill>
-                  <a:schemeClr val="dk1"/>
-                </a:solidFill>
-                <a:latin typeface="Arial" panose="020B0604020202020204" pitchFamily="34" charset="0"/>
-                <a:ea typeface="Calibri"/>
-                <a:cs typeface="Arial" panose="020B0604020202020204" pitchFamily="34" charset="0"/>
-                <a:sym typeface="Calibri"/>
-              </a:rPr>
-              <a:t>You can only use provided </a:t>
-            </a:r>
-            <a:r>
-              <a:rPr lang="en-US" b="1" dirty="0">
-                <a:solidFill>
-                  <a:schemeClr val="dk1"/>
-                </a:solidFill>
-                <a:latin typeface="Arial" panose="020B0604020202020204" pitchFamily="34" charset="0"/>
-                <a:ea typeface="Calibri"/>
-                <a:cs typeface="Arial" panose="020B0604020202020204" pitchFamily="34" charset="0"/>
-                <a:sym typeface="Calibri"/>
-              </a:rPr>
-              <a:t>template</a:t>
-            </a:r>
-            <a:r>
-              <a:rPr lang="en-US" b="1" i="0" u="none" strike="noStrike" cap="none" dirty="0">
-                <a:solidFill>
-                  <a:schemeClr val="dk1"/>
-                </a:solidFill>
-                <a:latin typeface="Arial" panose="020B0604020202020204" pitchFamily="34" charset="0"/>
-                <a:ea typeface="Calibri"/>
-                <a:cs typeface="Arial" panose="020B0604020202020204" pitchFamily="34" charset="0"/>
-                <a:sym typeface="Calibri"/>
-              </a:rPr>
-              <a:t> for making the </a:t>
-            </a:r>
-            <a:r>
-              <a:rPr lang="en-US" b="1" dirty="0">
-                <a:solidFill>
-                  <a:schemeClr val="dk1"/>
-                </a:solidFill>
-                <a:latin typeface="Arial" panose="020B0604020202020204" pitchFamily="34" charset="0"/>
-                <a:ea typeface="Calibri"/>
-                <a:cs typeface="Arial" panose="020B0604020202020204" pitchFamily="34" charset="0"/>
-                <a:sym typeface="Calibri"/>
-              </a:rPr>
-              <a:t>PPT</a:t>
-            </a:r>
-            <a:r>
-              <a:rPr lang="en-US" b="1" i="0" u="none" strike="noStrike" cap="none" dirty="0">
-                <a:solidFill>
-                  <a:schemeClr val="dk1"/>
-                </a:solidFill>
-                <a:latin typeface="Arial" panose="020B0604020202020204" pitchFamily="34" charset="0"/>
-                <a:ea typeface="Calibri"/>
-                <a:cs typeface="Arial" panose="020B0604020202020204" pitchFamily="34" charset="0"/>
-                <a:sym typeface="Calibri"/>
-              </a:rPr>
-              <a:t> without changing the idea details pointers (mentioned in previous slides).</a:t>
-            </a:r>
-          </a:p>
-          <a:p>
-            <a:pPr marL="514350" marR="0" lvl="0" indent="-514350" algn="just" rtl="0">
-              <a:lnSpc>
-                <a:spcPct val="90000"/>
-              </a:lnSpc>
-              <a:spcBef>
-                <a:spcPts val="1000"/>
-              </a:spcBef>
-              <a:spcAft>
-                <a:spcPts val="0"/>
-              </a:spcAft>
-              <a:buClr>
-                <a:schemeClr val="dk1"/>
-              </a:buClr>
-              <a:buSzPct val="100000"/>
-              <a:buFont typeface="Calibri"/>
-              <a:buAutoNum type="arabicPeriod"/>
-            </a:pPr>
-            <a:r>
-              <a:rPr lang="en-US" b="1" i="0" u="none" strike="noStrike" cap="none" dirty="0">
-                <a:solidFill>
-                  <a:schemeClr val="dk1"/>
-                </a:solidFill>
-                <a:latin typeface="Arial" panose="020B0604020202020204" pitchFamily="34" charset="0"/>
-                <a:ea typeface="Calibri"/>
-                <a:cs typeface="Arial" panose="020B0604020202020204" pitchFamily="34" charset="0"/>
-                <a:sym typeface="Calibri"/>
-              </a:rPr>
-              <a:t>You need to save the file in PDF and upload the same on portal. No PPT, Word Doc or any other format will be supported.</a:t>
-            </a:r>
-            <a:endParaRPr lang="en-US" b="1" dirty="0">
-              <a:latin typeface="Arial" panose="020B0604020202020204" pitchFamily="34" charset="0"/>
-              <a:cs typeface="Arial" panose="020B0604020202020204" pitchFamily="34" charset="0"/>
-            </a:endParaRPr>
-          </a:p>
-          <a:p>
-            <a:pPr marL="514350" marR="0" lvl="0" indent="-349885" algn="just" rtl="0">
-              <a:lnSpc>
-                <a:spcPct val="90000"/>
-              </a:lnSpc>
-              <a:spcBef>
-                <a:spcPts val="1000"/>
-              </a:spcBef>
-              <a:spcAft>
-                <a:spcPts val="0"/>
-              </a:spcAft>
-              <a:buClr>
-                <a:schemeClr val="dk1"/>
-              </a:buClr>
-              <a:buSzPct val="100000"/>
-              <a:buFont typeface="Calibri"/>
-              <a:buNone/>
-            </a:pPr>
-            <a:endParaRPr lang="en-US" b="1" i="0" u="none" strike="noStrike" cap="none" dirty="0">
-              <a:solidFill>
-                <a:schemeClr val="dk1"/>
-              </a:solidFill>
-              <a:latin typeface="Arial" panose="020B0604020202020204" pitchFamily="34" charset="0"/>
-              <a:ea typeface="Calibri"/>
-              <a:cs typeface="Arial" panose="020B0604020202020204" pitchFamily="34" charset="0"/>
-              <a:sym typeface="Calibri"/>
-            </a:endParaRPr>
-          </a:p>
-          <a:p>
-            <a:pPr marL="0" marR="0" lvl="0" indent="0" algn="just" rtl="0">
-              <a:lnSpc>
-                <a:spcPct val="90000"/>
-              </a:lnSpc>
-              <a:spcBef>
-                <a:spcPts val="1000"/>
-              </a:spcBef>
-              <a:spcAft>
-                <a:spcPts val="0"/>
-              </a:spcAft>
-              <a:buClr>
-                <a:schemeClr val="dk1"/>
-              </a:buClr>
-              <a:buSzPct val="100000"/>
-              <a:buFont typeface="Arial"/>
-              <a:buNone/>
-            </a:pPr>
-            <a:r>
-              <a:rPr lang="en-US" b="1" i="0" u="none" strike="noStrike" cap="none" dirty="0">
-                <a:solidFill>
-                  <a:srgbClr val="C00000"/>
-                </a:solidFill>
-                <a:latin typeface="Arial" panose="020B0604020202020204" pitchFamily="34" charset="0"/>
-                <a:ea typeface="Calibri"/>
-                <a:cs typeface="Arial" panose="020B0604020202020204" pitchFamily="34" charset="0"/>
-                <a:sym typeface="Calibri"/>
-              </a:rPr>
-              <a:t>Note - You can delete this slide (Important Pointers) when you upload the details of your idea portal.</a:t>
-            </a:r>
-            <a:endParaRPr lang="en-US" b="1" dirty="0">
-              <a:solidFill>
-                <a:srgbClr val="C00000"/>
-              </a:solidFill>
-              <a:latin typeface="Arial" panose="020B0604020202020204" pitchFamily="34" charset="0"/>
-              <a:cs typeface="Arial" panose="020B0604020202020204" pitchFamily="34" charset="0"/>
-            </a:endParaRPr>
-          </a:p>
-          <a:p>
-            <a:pPr marL="914400" marR="0" lvl="1" indent="-316230" algn="just" rtl="0">
-              <a:lnSpc>
-                <a:spcPct val="90000"/>
-              </a:lnSpc>
-              <a:spcBef>
-                <a:spcPts val="500"/>
-              </a:spcBef>
-              <a:spcAft>
-                <a:spcPts val="0"/>
-              </a:spcAft>
-              <a:buClr>
-                <a:schemeClr val="dk1"/>
-              </a:buClr>
-              <a:buSzPct val="100000"/>
-              <a:buFont typeface="Calibri"/>
-              <a:buNone/>
-            </a:pPr>
-            <a:endParaRPr lang="en-US" sz="2000" b="1" i="0" u="none" strike="noStrike" cap="none" dirty="0">
-              <a:solidFill>
-                <a:schemeClr val="dk1"/>
-              </a:solidFill>
-              <a:latin typeface="Arial" panose="020B0604020202020204" pitchFamily="34" charset="0"/>
-              <a:ea typeface="Calibri"/>
-              <a:cs typeface="Arial" panose="020B0604020202020204" pitchFamily="34" charset="0"/>
-              <a:sym typeface="Calibri"/>
-            </a:endParaRPr>
-          </a:p>
-        </p:txBody>
-      </p:sp>
-    </p:spTree>
-    <p:extLst>
-      <p:ext uri="{BB962C8B-B14F-4D97-AF65-F5344CB8AC3E}">
-        <p14:creationId xmlns:p14="http://schemas.microsoft.com/office/powerpoint/2010/main" val="1588084416"/>
-      </p:ext>
-    </p:extLst>
-  </p:cSld>
-  <p:clrMapOvr>
-    <a:masterClrMapping/>
-  </p:clrMapOvr>
-</p:sld>
-</file>
-
-<file path=ppt/slides/slide2.xml><?xml version="1.0" encoding="utf-8"?>
-<p:sld xmlns:a="http://schemas.openxmlformats.org/drawingml/2006/main" xmlns:r="http://schemas.openxmlformats.org/officeDocument/2006/relationships" xmlns:p="http://schemas.openxmlformats.org/presentationml/2006/main">
-  <p:cSld>
-    <p:spTree>
-      <p:nvGrpSpPr>
-        <p:cNvPr id="1" name=""/>
-        <p:cNvGrpSpPr/>
-        <p:nvPr/>
-      </p:nvGrpSpPr>
-      <p:grpSpPr>
-        <a:xfrm>
-          <a:off x="0" y="0"/>
-          <a:ext cx="0" cy="0"/>
-          <a:chOff x="0" y="0"/>
-          <a:chExt cx="0" cy="0"/>
-        </a:xfrm>
-      </p:grpSpPr>
-      <p:sp>
-        <p:nvSpPr>
-          <p:cNvPr id="4" name="Footer Placeholder 3">
-            <a:extLst>
-              <a:ext uri="{FF2B5EF4-FFF2-40B4-BE49-F238E27FC236}">
-                <a16:creationId xmlns:a16="http://schemas.microsoft.com/office/drawing/2014/main" id="{C2A033A5-F70E-7E73-0B8C-FA62C08DEB56}"/>
-              </a:ext>
-            </a:extLst>
-          </p:cNvPr>
-          <p:cNvSpPr>
-            <a:spLocks noGrp="1"/>
-          </p:cNvSpPr>
-          <p:nvPr>
-            <p:ph type="ftr" sz="quarter" idx="11"/>
-          </p:nvPr>
-        </p:nvSpPr>
-        <p:spPr/>
-        <p:txBody>
-          <a:bodyPr/>
-          <a:lstStyle/>
-          <a:p>
-            <a:pPr>
-              <a:defRPr/>
-            </a:pPr>
-            <a:r>
-              <a:rPr lang="en-US"/>
-              <a:t>@SIH Idea submission- Template</a:t>
-            </a:r>
-          </a:p>
-        </p:txBody>
-      </p:sp>
-      <p:sp>
-        <p:nvSpPr>
-          <p:cNvPr id="5" name="Slide Number Placeholder 4">
-            <a:extLst>
-              <a:ext uri="{FF2B5EF4-FFF2-40B4-BE49-F238E27FC236}">
-                <a16:creationId xmlns:a16="http://schemas.microsoft.com/office/drawing/2014/main" id="{EC99EC04-BCF1-5A69-7D5A-95D43C9763A1}"/>
-              </a:ext>
-            </a:extLst>
-          </p:cNvPr>
-          <p:cNvSpPr>
-            <a:spLocks noGrp="1"/>
-          </p:cNvSpPr>
-          <p:nvPr>
-            <p:ph type="sldNum" sz="quarter" idx="12"/>
-          </p:nvPr>
-        </p:nvSpPr>
-        <p:spPr/>
-        <p:txBody>
-          <a:bodyPr/>
-          <a:lstStyle/>
-          <a:p>
-            <a:fld id="{677C3CE7-23F7-4828-823C-E0205DF2CF97}" type="slidenum">
-              <a:rPr lang="en-US" smtClean="0"/>
-              <a:pPr/>
-              <a:t>2</a:t>
-            </a:fld>
-            <a:endParaRPr lang="en-US"/>
-          </a:p>
-        </p:txBody>
-      </p:sp>
-      <p:sp>
-        <p:nvSpPr>
-          <p:cNvPr id="6" name="Subtitle 3">
-            <a:extLst>
-              <a:ext uri="{FF2B5EF4-FFF2-40B4-BE49-F238E27FC236}">
-                <a16:creationId xmlns:a16="http://schemas.microsoft.com/office/drawing/2014/main" id="{E0A8E5C6-6BFC-01E5-DDF5-B6A7738A64F4}"/>
-              </a:ext>
-            </a:extLst>
-          </p:cNvPr>
-          <p:cNvSpPr txBox="1">
-            <a:spLocks/>
-          </p:cNvSpPr>
-          <p:nvPr/>
-        </p:nvSpPr>
-        <p:spPr bwMode="auto">
-          <a:xfrm>
-            <a:off x="1415369" y="-365784"/>
-            <a:ext cx="8534400" cy="1752600"/>
-          </a:xfrm>
-          <a:prstGeom prst="rect">
-            <a:avLst/>
-          </a:prstGeom>
-          <a:noFill/>
-          <a:ln w="9525">
-            <a:noFill/>
-            <a:miter lim="800000"/>
-            <a:headEnd/>
-            <a:tailEnd/>
-          </a:ln>
-        </p:spPr>
-        <p:txBody>
-          <a:bodyPr vert="horz" wrap="square" lIns="91440" tIns="45720" rIns="91440" bIns="45720" numCol="1" anchor="t" anchorCtr="0" compatLnSpc="1">
-            <a:prstTxWarp prst="textNoShape">
-              <a:avLst/>
-            </a:prstTxWarp>
-          </a:bodyPr>
-          <a:lstStyle>
-            <a:lvl1pPr marL="0" indent="0" algn="ctr" defTabSz="457200" rtl="0" eaLnBrk="0" fontAlgn="base" hangingPunct="0">
-              <a:spcBef>
-                <a:spcPct val="20000"/>
-              </a:spcBef>
-              <a:spcAft>
-                <a:spcPct val="0"/>
-              </a:spcAft>
-              <a:buFont typeface="Arial" pitchFamily="34" charset="0"/>
-              <a:buNone/>
-              <a:defRPr sz="3200" kern="1200">
-                <a:solidFill>
-                  <a:schemeClr val="tx1">
-                    <a:tint val="75000"/>
-                  </a:schemeClr>
-                </a:solidFill>
-                <a:latin typeface="TradeGothic"/>
-                <a:ea typeface="ＭＳ Ｐゴシック" charset="0"/>
-                <a:cs typeface="ＭＳ Ｐゴシック" charset="0"/>
-              </a:defRPr>
-            </a:lvl1pPr>
-            <a:lvl2pPr marL="457200" indent="0" algn="ctr" defTabSz="457200" rtl="0" eaLnBrk="0" fontAlgn="base" hangingPunct="0">
-              <a:spcBef>
-                <a:spcPct val="20000"/>
-              </a:spcBef>
-              <a:spcAft>
-                <a:spcPct val="0"/>
-              </a:spcAft>
-              <a:buFont typeface="Arial" pitchFamily="34" charset="0"/>
-              <a:buNone/>
-              <a:defRPr sz="2800" kern="1200">
-                <a:solidFill>
-                  <a:schemeClr val="tx1">
-                    <a:tint val="75000"/>
-                  </a:schemeClr>
-                </a:solidFill>
-                <a:latin typeface="TradeGothic"/>
-                <a:ea typeface="ＭＳ Ｐゴシック" charset="0"/>
-                <a:cs typeface="+mn-cs"/>
-              </a:defRPr>
-            </a:lvl2pPr>
-            <a:lvl3pPr marL="914400" indent="0" algn="ctr" defTabSz="457200" rtl="0" eaLnBrk="0" fontAlgn="base" hangingPunct="0">
-              <a:spcBef>
-                <a:spcPct val="20000"/>
-              </a:spcBef>
-              <a:spcAft>
-                <a:spcPct val="0"/>
-              </a:spcAft>
-              <a:buFont typeface="Arial" pitchFamily="34" charset="0"/>
-              <a:buNone/>
-              <a:defRPr sz="2400" kern="1200">
-                <a:solidFill>
-                  <a:schemeClr val="tx1">
-                    <a:tint val="75000"/>
-                  </a:schemeClr>
-                </a:solidFill>
-                <a:latin typeface="TradeGothic"/>
-                <a:ea typeface="ＭＳ Ｐゴシック" charset="0"/>
-                <a:cs typeface="+mn-cs"/>
-              </a:defRPr>
-            </a:lvl3pPr>
-            <a:lvl4pPr marL="1371600" indent="0" algn="ctr" defTabSz="457200" rtl="0" eaLnBrk="0" fontAlgn="base" hangingPunct="0">
-              <a:spcBef>
-                <a:spcPct val="20000"/>
-              </a:spcBef>
-              <a:spcAft>
-                <a:spcPct val="0"/>
-              </a:spcAft>
-              <a:buFont typeface="Arial" pitchFamily="34" charset="0"/>
-              <a:buNone/>
-              <a:defRPr sz="2000" kern="1200">
-                <a:solidFill>
-                  <a:schemeClr val="tx1">
-                    <a:tint val="75000"/>
-                  </a:schemeClr>
-                </a:solidFill>
-                <a:latin typeface="TradeGothic"/>
-                <a:ea typeface="ＭＳ Ｐゴシック" charset="0"/>
-                <a:cs typeface="+mn-cs"/>
-              </a:defRPr>
-            </a:lvl4pPr>
-            <a:lvl5pPr marL="1828800" indent="0" algn="ctr" defTabSz="457200" rtl="0" eaLnBrk="0" fontAlgn="base" hangingPunct="0">
-              <a:spcBef>
-                <a:spcPct val="20000"/>
-              </a:spcBef>
-              <a:spcAft>
-                <a:spcPct val="0"/>
-              </a:spcAft>
-              <a:buFont typeface="Arial" pitchFamily="34" charset="0"/>
-              <a:buNone/>
-              <a:defRPr sz="2000" kern="1200">
-                <a:solidFill>
-                  <a:schemeClr val="tx1">
-                    <a:tint val="75000"/>
-                  </a:schemeClr>
-                </a:solidFill>
-                <a:latin typeface="TradeGothic"/>
-                <a:ea typeface="ＭＳ Ｐゴシック" charset="0"/>
-                <a:cs typeface="+mn-cs"/>
-              </a:defRPr>
-            </a:lvl5pPr>
-            <a:lvl6pPr marL="2286000" indent="0" algn="ctr" defTabSz="457200" rtl="0" eaLnBrk="1" latinLnBrk="0" hangingPunct="1">
-              <a:spcBef>
-                <a:spcPct val="20000"/>
-              </a:spcBef>
-              <a:buFont typeface="Arial"/>
-              <a:buNone/>
-              <a:defRPr sz="2000" kern="1200">
-                <a:solidFill>
-                  <a:schemeClr val="tx1">
-                    <a:tint val="75000"/>
-                  </a:schemeClr>
-                </a:solidFill>
-                <a:latin typeface="+mn-lt"/>
-                <a:ea typeface="+mn-ea"/>
-                <a:cs typeface="+mn-cs"/>
-              </a:defRPr>
-            </a:lvl6pPr>
-            <a:lvl7pPr marL="2743200" indent="0" algn="ctr" defTabSz="457200" rtl="0" eaLnBrk="1" latinLnBrk="0" hangingPunct="1">
-              <a:spcBef>
-                <a:spcPct val="20000"/>
-              </a:spcBef>
-              <a:buFont typeface="Arial"/>
-              <a:buNone/>
-              <a:defRPr sz="2000" kern="1200">
-                <a:solidFill>
-                  <a:schemeClr val="tx1">
-                    <a:tint val="75000"/>
-                  </a:schemeClr>
-                </a:solidFill>
-                <a:latin typeface="+mn-lt"/>
-                <a:ea typeface="+mn-ea"/>
-                <a:cs typeface="+mn-cs"/>
-              </a:defRPr>
-            </a:lvl7pPr>
-            <a:lvl8pPr marL="3200400" indent="0" algn="ctr" defTabSz="457200" rtl="0" eaLnBrk="1" latinLnBrk="0" hangingPunct="1">
-              <a:spcBef>
-                <a:spcPct val="20000"/>
-              </a:spcBef>
-              <a:buFont typeface="Arial"/>
-              <a:buNone/>
-              <a:defRPr sz="2000" kern="1200">
-                <a:solidFill>
-                  <a:schemeClr val="tx1">
-                    <a:tint val="75000"/>
-                  </a:schemeClr>
-                </a:solidFill>
-                <a:latin typeface="+mn-lt"/>
-                <a:ea typeface="+mn-ea"/>
-                <a:cs typeface="+mn-cs"/>
-              </a:defRPr>
-            </a:lvl8pPr>
-            <a:lvl9pPr marL="3657600" indent="0" algn="ctr" defTabSz="457200" rtl="0" eaLnBrk="1" latinLnBrk="0" hangingPunct="1">
-              <a:spcBef>
-                <a:spcPct val="20000"/>
-              </a:spcBef>
-              <a:buFont typeface="Arial"/>
-              <a:buNone/>
-              <a:defRPr sz="2000" kern="1200">
-                <a:solidFill>
-                  <a:schemeClr val="tx1">
-                    <a:tint val="75000"/>
-                  </a:schemeClr>
-                </a:solidFill>
-                <a:latin typeface="+mn-lt"/>
-                <a:ea typeface="+mn-ea"/>
-                <a:cs typeface="+mn-cs"/>
-              </a:defRPr>
-            </a:lvl9pPr>
-          </a:lstStyle>
-          <a:p>
-            <a:endParaRPr lang="en-US" b="1" dirty="0">
-              <a:solidFill>
-                <a:schemeClr val="tx1"/>
-              </a:solidFill>
-              <a:latin typeface="Times New Roman" panose="02020603050405020304" pitchFamily="18" charset="0"/>
-              <a:cs typeface="Times New Roman" panose="02020603050405020304" pitchFamily="18" charset="0"/>
-            </a:endParaRPr>
-          </a:p>
-          <a:p>
-            <a:r>
-              <a:rPr lang="en-US" b="1" dirty="0">
-                <a:solidFill>
-                  <a:schemeClr val="tx1"/>
-                </a:solidFill>
-                <a:latin typeface="Times New Roman" panose="02020603050405020304" pitchFamily="18" charset="0"/>
-                <a:cs typeface="Times New Roman" panose="02020603050405020304" pitchFamily="18" charset="0"/>
-              </a:rPr>
-              <a:t>TITLE PAGE</a:t>
-            </a:r>
-            <a:endParaRPr lang="en-IN" b="1" dirty="0">
-              <a:solidFill>
-                <a:schemeClr val="tx1"/>
-              </a:solidFill>
-              <a:latin typeface="Times New Roman" panose="02020603050405020304" pitchFamily="18" charset="0"/>
-              <a:cs typeface="Times New Roman" panose="02020603050405020304" pitchFamily="18" charset="0"/>
-            </a:endParaRPr>
-          </a:p>
-        </p:txBody>
-      </p:sp>
-      <p:sp>
-        <p:nvSpPr>
-          <p:cNvPr id="7" name="TextBox 6">
-            <a:extLst>
-              <a:ext uri="{FF2B5EF4-FFF2-40B4-BE49-F238E27FC236}">
-                <a16:creationId xmlns:a16="http://schemas.microsoft.com/office/drawing/2014/main" id="{AFB1BDE7-2DA0-F526-CF6E-F50D43C2C5FE}"/>
-              </a:ext>
-            </a:extLst>
-          </p:cNvPr>
-          <p:cNvSpPr txBox="1"/>
-          <p:nvPr/>
-        </p:nvSpPr>
-        <p:spPr>
-          <a:xfrm>
-            <a:off x="397274" y="1203454"/>
-            <a:ext cx="5924550" cy="4686668"/>
-          </a:xfrm>
-          <a:prstGeom prst="rect">
-            <a:avLst/>
-          </a:prstGeom>
-          <a:noFill/>
-        </p:spPr>
-        <p:txBody>
           <a:bodyPr wrap="square" rtlCol="0">
             <a:spAutoFit/>
           </a:bodyPr>
           <a:lstStyle/>
           <a:p>
-            <a:endParaRPr lang="en-US" dirty="0"/>
+            <a:pPr algn="ctr"/>
+            <a:r>
+              <a:rPr lang="en-IN" sz="2000" b="1" dirty="0"/>
+              <a:t>Strategies</a:t>
+            </a:r>
+          </a:p>
+          <a:p>
+            <a:endParaRPr lang="en-IN" b="1" dirty="0"/>
           </a:p>
           <a:p>
             <a:pPr marL="285750" indent="-285750" algn="just">
-              <a:lnSpc>
-                <a:spcPct val="200000"/>
-              </a:lnSpc>
               <a:buFont typeface="Arial" panose="020B0604020202020204" pitchFamily="34" charset="0"/>
               <a:buChar char="•"/>
             </a:pPr>
             <a:r>
-              <a:rPr lang="en-US" sz="2400" b="1" dirty="0">
-                <a:latin typeface="Arial" panose="020B0604020202020204" pitchFamily="34" charset="0"/>
-                <a:cs typeface="Arial" panose="020B0604020202020204" pitchFamily="34" charset="0"/>
-              </a:rPr>
-              <a:t>Problem Statement ID –</a:t>
+              <a:rPr lang="en-IN" b="1" dirty="0"/>
+              <a:t>Safety Validator</a:t>
+            </a:r>
+            <a:r>
+              <a:rPr lang="en-IN" dirty="0"/>
+              <a:t> checks every AI-generated control action before execution.</a:t>
             </a:r>
           </a:p>
           <a:p>
             <a:pPr marL="285750" indent="-285750" algn="just">
-              <a:lnSpc>
-                <a:spcPct val="200000"/>
-              </a:lnSpc>
               <a:buFont typeface="Arial" panose="020B0604020202020204" pitchFamily="34" charset="0"/>
               <a:buChar char="•"/>
             </a:pPr>
             <a:r>
-              <a:rPr lang="en-US" sz="2400" b="1" dirty="0">
-                <a:latin typeface="Arial" panose="020B0604020202020204" pitchFamily="34" charset="0"/>
-                <a:cs typeface="Arial" panose="020B0604020202020204" pitchFamily="34" charset="0"/>
-              </a:rPr>
-              <a:t>Problem Statement Title-</a:t>
+              <a:rPr lang="en-IN" b="1" dirty="0"/>
+              <a:t>Retry &amp; Last-Known-Good Fallback</a:t>
+            </a:r>
+            <a:r>
+              <a:rPr lang="en-IN" dirty="0"/>
+              <a:t> ensures reliable operation if AI output is invalid.</a:t>
             </a:r>
           </a:p>
           <a:p>
             <a:pPr marL="285750" indent="-285750" algn="just">
-              <a:lnSpc>
-                <a:spcPct val="200000"/>
-              </a:lnSpc>
               <a:buFont typeface="Arial" panose="020B0604020202020204" pitchFamily="34" charset="0"/>
               <a:buChar char="•"/>
             </a:pPr>
             <a:r>
-              <a:rPr lang="en-US" sz="2400" b="1" dirty="0">
-                <a:latin typeface="Arial" panose="020B0604020202020204" pitchFamily="34" charset="0"/>
-                <a:cs typeface="Arial" panose="020B0604020202020204" pitchFamily="34" charset="0"/>
-              </a:rPr>
-              <a:t>Theme-</a:t>
+              <a:rPr lang="en-IN" b="1" dirty="0"/>
+              <a:t>Rolling Context Builder</a:t>
+            </a:r>
+            <a:r>
+              <a:rPr lang="en-IN" dirty="0"/>
+              <a:t> summarizes telemetry, reducing prompt size and improving response time.</a:t>
             </a:r>
           </a:p>
           <a:p>
             <a:pPr marL="285750" indent="-285750" algn="just">
-              <a:lnSpc>
-                <a:spcPct val="200000"/>
-              </a:lnSpc>
               <a:buFont typeface="Arial" panose="020B0604020202020204" pitchFamily="34" charset="0"/>
               <a:buChar char="•"/>
             </a:pPr>
             <a:r>
-              <a:rPr lang="en-US" sz="2400" b="1" dirty="0">
-                <a:latin typeface="Arial" panose="020B0604020202020204" pitchFamily="34" charset="0"/>
-                <a:cs typeface="Arial" panose="020B0604020202020204" pitchFamily="34" charset="0"/>
-              </a:rPr>
-              <a:t>PS Category- Software/Hardware</a:t>
-            </a:r>
-          </a:p>
-          <a:p>
-            <a:pPr marL="285750" indent="-285750" algn="just">
-              <a:lnSpc>
-                <a:spcPct val="200000"/>
-              </a:lnSpc>
-              <a:buFont typeface="Arial" panose="020B0604020202020204" pitchFamily="34" charset="0"/>
-              <a:buChar char="•"/>
-            </a:pPr>
-            <a:r>
-              <a:rPr lang="en-US" sz="2400" b="1" dirty="0">
-                <a:latin typeface="Arial" panose="020B0604020202020204" pitchFamily="34" charset="0"/>
-                <a:cs typeface="Arial" panose="020B0604020202020204" pitchFamily="34" charset="0"/>
-              </a:rPr>
-              <a:t>Student Name (Registered on portal)</a:t>
-            </a:r>
-          </a:p>
-          <a:p>
-            <a:pPr marL="285750" indent="-285750" algn="just">
-              <a:lnSpc>
-                <a:spcPct val="200000"/>
-              </a:lnSpc>
-              <a:buFont typeface="Arial" panose="020B0604020202020204" pitchFamily="34" charset="0"/>
-              <a:buChar char="•"/>
-            </a:pPr>
-            <a:r>
-              <a:rPr lang="en-US" sz="2400" b="1" dirty="0">
-                <a:latin typeface="Arial" panose="020B0604020202020204" pitchFamily="34" charset="0"/>
-                <a:cs typeface="Arial" panose="020B0604020202020204" pitchFamily="34" charset="0"/>
-              </a:rPr>
-              <a:t>Student ID</a:t>
-            </a:r>
-            <a:endParaRPr lang="en-IN" sz="2400" b="1" dirty="0">
-              <a:latin typeface="Arial" panose="020B0604020202020204" pitchFamily="34" charset="0"/>
-              <a:cs typeface="Arial" panose="020B0604020202020204" pitchFamily="34" charset="0"/>
-            </a:endParaRPr>
+              <a:rPr lang="en-IN" b="1" dirty="0"/>
+              <a:t>MCP-based modular architecture</a:t>
+            </a:r>
+            <a:r>
+              <a:rPr lang="en-IN" dirty="0"/>
+              <a:t> enables integration with existing Building Management Systems and simplifies future expansion.</a:t>
+            </a:r>
           </a:p>
         </p:txBody>
       </p:sp>
     </p:spTree>
     <p:extLst>
       <p:ext uri="{BB962C8B-B14F-4D97-AF65-F5344CB8AC3E}">
-        <p14:creationId xmlns:p14="http://schemas.microsoft.com/office/powerpoint/2010/main" val="3319884780"/>
+        <p14:creationId xmlns:p14="http://schemas.microsoft.com/office/powerpoint/2010/main" val="3753387913"/>
       </p:ext>
     </p:extLst>
-  </p:cSld>
-  <p:clrMapOvr>
-    <a:masterClrMapping/>
-  </p:clrMapOvr>
-</p:sld>
-</file>
-
-<file path=ppt/slides/slide3.xml><?xml version="1.0" encoding="utf-8"?>
-<p:sld xmlns:a="http://schemas.openxmlformats.org/drawingml/2006/main" xmlns:r="http://schemas.openxmlformats.org/officeDocument/2006/relationships" xmlns:p="http://schemas.openxmlformats.org/presentationml/2006/main">
-  <p:cSld>
-    <p:spTree>
-      <p:nvGrpSpPr>
-        <p:cNvPr id="1" name=""/>
-        <p:cNvGrpSpPr/>
-        <p:nvPr/>
-      </p:nvGrpSpPr>
-      <p:grpSpPr>
-        <a:xfrm>
-          <a:off x="0" y="0"/>
-          <a:ext cx="0" cy="0"/>
-          <a:chOff x="0" y="0"/>
-          <a:chExt cx="0" cy="0"/>
-        </a:xfrm>
-      </p:grpSpPr>
-      <p:sp>
-        <p:nvSpPr>
-          <p:cNvPr id="15361" name="Title 1"/>
-          <p:cNvSpPr>
-            <a:spLocks noGrp="1"/>
-          </p:cNvSpPr>
-          <p:nvPr>
-            <p:ph type="title"/>
-          </p:nvPr>
-        </p:nvSpPr>
-        <p:spPr>
-          <a:xfrm>
-            <a:off x="182998" y="0"/>
-            <a:ext cx="10972800" cy="1143000"/>
-          </a:xfrm>
-        </p:spPr>
-        <p:txBody>
-          <a:bodyPr/>
-          <a:lstStyle/>
-          <a:p>
-            <a:pPr eaLnBrk="1" hangingPunct="1"/>
-            <a:br>
-              <a:rPr lang="en-US" sz="3600" b="1" dirty="0">
-                <a:latin typeface="Times New Roman" panose="02020603050405020304" pitchFamily="18" charset="0"/>
-                <a:ea typeface="ＭＳ Ｐゴシック" pitchFamily="1" charset="-128"/>
-                <a:cs typeface="Times New Roman" panose="02020603050405020304" pitchFamily="18" charset="0"/>
-              </a:rPr>
-            </a:br>
-            <a:r>
-              <a:rPr lang="en-US" sz="3600" b="1" dirty="0">
-                <a:latin typeface="Times New Roman" panose="02020603050405020304" pitchFamily="18" charset="0"/>
-                <a:ea typeface="ＭＳ Ｐゴシック" pitchFamily="1" charset="-128"/>
-                <a:cs typeface="Times New Roman" panose="02020603050405020304" pitchFamily="18" charset="0"/>
-              </a:rPr>
-              <a:t>IDEA TITLE</a:t>
-            </a:r>
-          </a:p>
-        </p:txBody>
-      </p:sp>
-      <p:sp>
-        <p:nvSpPr>
-          <p:cNvPr id="15362" name="TextBox 8"/>
-          <p:cNvSpPr txBox="1">
-            <a:spLocks noChangeArrowheads="1"/>
-          </p:cNvSpPr>
-          <p:nvPr/>
-        </p:nvSpPr>
-        <p:spPr bwMode="auto">
-          <a:xfrm>
-            <a:off x="-1" y="2064921"/>
-            <a:ext cx="12191999" cy="2492990"/>
-          </a:xfrm>
-          <a:prstGeom prst="rect">
-            <a:avLst/>
-          </a:prstGeom>
-          <a:noFill/>
-          <a:ln w="9525">
-            <a:noFill/>
-            <a:miter lim="800000"/>
-            <a:headEnd/>
-            <a:tailEnd/>
-          </a:ln>
-        </p:spPr>
-        <p:txBody>
-          <a:bodyPr wrap="square">
-            <a:spAutoFit/>
-          </a:bodyPr>
-          <a:lstStyle/>
-          <a:p>
-            <a:r>
-              <a:rPr lang="en-US" sz="3200" b="1" u="sng" dirty="0">
-                <a:latin typeface="Arial" pitchFamily="34" charset="0"/>
-                <a:cs typeface="Arial" pitchFamily="34" charset="0"/>
-              </a:rPr>
-              <a:t>Proposed Solution (Describe your Idea/Solution/Prototype)</a:t>
-            </a:r>
-            <a:endParaRPr lang="en-US" sz="3200" u="sng" dirty="0">
-              <a:latin typeface="Arial" pitchFamily="34" charset="0"/>
-              <a:cs typeface="Arial" pitchFamily="34" charset="0"/>
-            </a:endParaRPr>
-          </a:p>
-          <a:p>
-            <a:pPr marL="342900" indent="-342900">
-              <a:buFont typeface="Arial" panose="020B0604020202020204" pitchFamily="34" charset="0"/>
-              <a:buChar char="•"/>
-            </a:pPr>
-            <a:endParaRPr lang="en-US" sz="2000" u="sng" dirty="0">
-              <a:solidFill>
-                <a:schemeClr val="tx2"/>
-              </a:solidFill>
-              <a:latin typeface="Arial" pitchFamily="34" charset="0"/>
-              <a:cs typeface="Arial" pitchFamily="34" charset="0"/>
-            </a:endParaRPr>
-          </a:p>
-          <a:p>
-            <a:pPr marL="342900" indent="-342900">
-              <a:buFont typeface="Arial" panose="020B0604020202020204" pitchFamily="34" charset="0"/>
-              <a:buChar char="•"/>
-            </a:pPr>
-            <a:endParaRPr lang="en-US" sz="2000" u="sng" dirty="0">
-              <a:solidFill>
-                <a:schemeClr val="tx2"/>
-              </a:solidFill>
-              <a:latin typeface="Arial" pitchFamily="34" charset="0"/>
-              <a:cs typeface="Arial" pitchFamily="34" charset="0"/>
-            </a:endParaRPr>
-          </a:p>
-          <a:p>
-            <a:pPr marL="342900" indent="-342900" algn="just">
-              <a:buFont typeface="Arial" panose="020B0604020202020204" pitchFamily="34" charset="0"/>
-              <a:buChar char="•"/>
-            </a:pPr>
-            <a:r>
-              <a:rPr lang="en-US" sz="2800" dirty="0">
-                <a:latin typeface="Arial" pitchFamily="34" charset="0"/>
-                <a:cs typeface="Arial" pitchFamily="34" charset="0"/>
-              </a:rPr>
-              <a:t>Detailed explanation of the proposed solution</a:t>
-            </a:r>
-          </a:p>
-          <a:p>
-            <a:pPr marL="342900" indent="-342900" algn="just">
-              <a:buFont typeface="Arial" panose="020B0604020202020204" pitchFamily="34" charset="0"/>
-              <a:buChar char="•"/>
-            </a:pPr>
-            <a:r>
-              <a:rPr lang="en-US" sz="2800" dirty="0">
-                <a:latin typeface="Arial" pitchFamily="34" charset="0"/>
-                <a:cs typeface="Arial" pitchFamily="34" charset="0"/>
-              </a:rPr>
-              <a:t> How it addresses the problem</a:t>
-            </a:r>
-          </a:p>
-          <a:p>
-            <a:pPr marL="342900" indent="-342900" algn="just">
-              <a:buFont typeface="Arial" panose="020B0604020202020204" pitchFamily="34" charset="0"/>
-              <a:buChar char="•"/>
-            </a:pPr>
-            <a:r>
-              <a:rPr lang="en-US" sz="2800" dirty="0">
-                <a:latin typeface="Arial" pitchFamily="34" charset="0"/>
-                <a:cs typeface="Arial" pitchFamily="34" charset="0"/>
-              </a:rPr>
-              <a:t>Innovation and uniqueness of the solution </a:t>
-            </a:r>
-          </a:p>
-        </p:txBody>
-      </p:sp>
-      <p:sp>
-        <p:nvSpPr>
-          <p:cNvPr id="6" name="Slide Number Placeholder 5"/>
-          <p:cNvSpPr>
-            <a:spLocks noGrp="1"/>
-          </p:cNvSpPr>
-          <p:nvPr>
-            <p:ph type="sldNum" sz="quarter" idx="12"/>
-          </p:nvPr>
-        </p:nvSpPr>
-        <p:spPr/>
-        <p:txBody>
-          <a:bodyPr/>
-          <a:lstStyle/>
-          <a:p>
-            <a:fld id="{677C3CE7-23F7-4828-823C-E0205DF2CF97}" type="slidenum">
-              <a:rPr lang="en-US" b="1" smtClean="0">
-                <a:solidFill>
-                  <a:schemeClr val="bg1"/>
-                </a:solidFill>
-              </a:rPr>
-              <a:pPr/>
-              <a:t>3</a:t>
-            </a:fld>
-            <a:endParaRPr lang="en-US" b="1" dirty="0">
-              <a:solidFill>
-                <a:schemeClr val="bg1"/>
-              </a:solidFill>
-            </a:endParaRPr>
-          </a:p>
-        </p:txBody>
-      </p:sp>
-      <p:sp>
-        <p:nvSpPr>
-          <p:cNvPr id="7" name="Footer Placeholder 6"/>
-          <p:cNvSpPr>
-            <a:spLocks noGrp="1"/>
-          </p:cNvSpPr>
-          <p:nvPr>
-            <p:ph type="ftr" sz="quarter" idx="11"/>
-          </p:nvPr>
-        </p:nvSpPr>
-        <p:spPr>
-          <a:xfrm>
-            <a:off x="4648200" y="6356353"/>
-            <a:ext cx="3204000" cy="365125"/>
-          </a:xfrm>
-        </p:spPr>
-        <p:txBody>
-          <a:bodyPr/>
-          <a:lstStyle/>
-          <a:p>
-            <a:pPr>
-              <a:defRPr/>
-            </a:pPr>
-            <a:r>
-              <a:rPr lang="en-US">
-                <a:solidFill>
-                  <a:schemeClr val="bg1"/>
-                </a:solidFill>
-              </a:rPr>
-              <a:t>@SIH Idea submission- Template</a:t>
-            </a:r>
-            <a:endParaRPr lang="en-US" dirty="0">
-              <a:solidFill>
-                <a:schemeClr val="bg1"/>
-              </a:solidFill>
-            </a:endParaRPr>
-          </a:p>
-        </p:txBody>
-      </p:sp>
-    </p:spTree>
-  </p:cSld>
-  <p:clrMapOvr>
-    <a:masterClrMapping/>
-  </p:clrMapOvr>
-</p:sld>
-</file>
-
-<file path=ppt/slides/slide4.xml><?xml version="1.0" encoding="utf-8"?>
-<p:sld xmlns:a="http://schemas.openxmlformats.org/drawingml/2006/main" xmlns:r="http://schemas.openxmlformats.org/officeDocument/2006/relationships" xmlns:p="http://schemas.openxmlformats.org/presentationml/2006/main">
-  <p:cSld>
-    <p:spTree>
-      <p:nvGrpSpPr>
-        <p:cNvPr id="1" name=""/>
-        <p:cNvGrpSpPr/>
-        <p:nvPr/>
-      </p:nvGrpSpPr>
-      <p:grpSpPr>
-        <a:xfrm>
-          <a:off x="0" y="0"/>
-          <a:ext cx="0" cy="0"/>
-          <a:chOff x="0" y="0"/>
-          <a:chExt cx="0" cy="0"/>
-        </a:xfrm>
-      </p:grpSpPr>
-      <p:sp>
-        <p:nvSpPr>
-          <p:cNvPr id="17409" name="Title 1"/>
-          <p:cNvSpPr>
-            <a:spLocks noGrp="1"/>
-          </p:cNvSpPr>
-          <p:nvPr>
-            <p:ph type="title"/>
-          </p:nvPr>
-        </p:nvSpPr>
-        <p:spPr/>
-        <p:txBody>
-          <a:bodyPr/>
-          <a:lstStyle/>
-          <a:p>
-            <a:pPr eaLnBrk="1" hangingPunct="1"/>
-            <a:r>
-              <a:rPr lang="en-US" sz="3600" b="1" dirty="0">
-                <a:latin typeface="Times New Roman" panose="02020603050405020304" pitchFamily="18" charset="0"/>
-                <a:ea typeface="ＭＳ Ｐゴシック" pitchFamily="1" charset="-128"/>
-                <a:cs typeface="Times New Roman" panose="02020603050405020304" pitchFamily="18" charset="0"/>
-              </a:rPr>
-              <a:t>TECHNICAL APPROACH</a:t>
-            </a:r>
-          </a:p>
-        </p:txBody>
-      </p:sp>
-      <p:sp>
-        <p:nvSpPr>
-          <p:cNvPr id="17410" name="TextBox 8"/>
-          <p:cNvSpPr txBox="1">
-            <a:spLocks noChangeArrowheads="1"/>
-          </p:cNvSpPr>
-          <p:nvPr/>
-        </p:nvSpPr>
-        <p:spPr bwMode="auto">
-          <a:xfrm>
-            <a:off x="609600" y="2533653"/>
-            <a:ext cx="9385300" cy="1815882"/>
-          </a:xfrm>
-          <a:prstGeom prst="rect">
-            <a:avLst/>
-          </a:prstGeom>
-          <a:noFill/>
-          <a:ln w="9525">
-            <a:noFill/>
-            <a:miter lim="800000"/>
-            <a:headEnd/>
-            <a:tailEnd/>
-          </a:ln>
-        </p:spPr>
-        <p:txBody>
-          <a:bodyPr wrap="square">
-            <a:spAutoFit/>
-          </a:bodyPr>
-          <a:lstStyle/>
-          <a:p>
-            <a:pPr marL="342900" indent="-342900" algn="just">
-              <a:buFont typeface="Arial" panose="020B0604020202020204" pitchFamily="34" charset="0"/>
-              <a:buChar char="•"/>
-            </a:pPr>
-            <a:r>
-              <a:rPr lang="en-US" sz="2800" dirty="0">
-                <a:latin typeface="Arial" pitchFamily="34" charset="0"/>
-                <a:cs typeface="Arial" pitchFamily="34" charset="0"/>
-              </a:rPr>
-              <a:t>Technologies to be used (e.g. programming languages, frameworks, hardware)</a:t>
-            </a:r>
-          </a:p>
-          <a:p>
-            <a:pPr marL="342900" indent="-342900" algn="just">
-              <a:buFont typeface="Arial" panose="020B0604020202020204" pitchFamily="34" charset="0"/>
-              <a:buChar char="•"/>
-            </a:pPr>
-            <a:r>
-              <a:rPr lang="en-US" sz="2800" dirty="0">
-                <a:latin typeface="Arial" pitchFamily="34" charset="0"/>
-                <a:cs typeface="Arial" pitchFamily="34" charset="0"/>
-              </a:rPr>
-              <a:t>Methodology and process for implementation (Flow Charts/Images/ working prototype)</a:t>
-            </a:r>
-          </a:p>
-        </p:txBody>
-      </p:sp>
-      <p:sp>
-        <p:nvSpPr>
-          <p:cNvPr id="6" name="Slide Number Placeholder 5"/>
-          <p:cNvSpPr>
-            <a:spLocks noGrp="1"/>
-          </p:cNvSpPr>
-          <p:nvPr>
-            <p:ph type="sldNum" sz="quarter" idx="12"/>
-          </p:nvPr>
-        </p:nvSpPr>
-        <p:spPr/>
-        <p:txBody>
-          <a:bodyPr/>
-          <a:lstStyle/>
-          <a:p>
-            <a:fld id="{677C3CE7-23F7-4828-823C-E0205DF2CF97}" type="slidenum">
-              <a:rPr lang="en-US" b="1">
-                <a:solidFill>
-                  <a:schemeClr val="bg1"/>
-                </a:solidFill>
-              </a:rPr>
-              <a:pPr/>
-              <a:t>4</a:t>
-            </a:fld>
-            <a:endParaRPr lang="en-US" b="1" dirty="0">
-              <a:solidFill>
-                <a:schemeClr val="bg1"/>
-              </a:solidFill>
-            </a:endParaRPr>
-          </a:p>
-        </p:txBody>
-      </p:sp>
-      <p:sp>
-        <p:nvSpPr>
-          <p:cNvPr id="7" name="Footer Placeholder 6"/>
-          <p:cNvSpPr>
-            <a:spLocks noGrp="1"/>
-          </p:cNvSpPr>
-          <p:nvPr>
-            <p:ph type="ftr" sz="quarter" idx="11"/>
-          </p:nvPr>
-        </p:nvSpPr>
-        <p:spPr>
-          <a:xfrm>
-            <a:off x="4648200" y="6356353"/>
-            <a:ext cx="3204000" cy="365125"/>
-          </a:xfrm>
-        </p:spPr>
-        <p:txBody>
-          <a:bodyPr/>
-          <a:lstStyle/>
-          <a:p>
-            <a:pPr>
-              <a:defRPr/>
-            </a:pPr>
-            <a:r>
-              <a:rPr lang="en-US">
-                <a:solidFill>
-                  <a:schemeClr val="bg1"/>
-                </a:solidFill>
-              </a:rPr>
-              <a:t>@SIH Idea submission- Template</a:t>
-            </a:r>
-            <a:endParaRPr lang="en-US" dirty="0">
-              <a:solidFill>
-                <a:schemeClr val="bg1"/>
-              </a:solidFill>
-            </a:endParaRPr>
-          </a:p>
-        </p:txBody>
-      </p:sp>
-    </p:spTree>
   </p:cSld>
   <p:clrMapOvr>
     <a:masterClrMapping/>
@@ -6466,7 +6461,13 @@
   <p:cSld>
     <p:spTree>
       <p:nvGrpSpPr>
-        <p:cNvPr id="1" name=""/>
+        <p:cNvPr id="1" name="">
+          <a:extLst>
+            <a:ext uri="{FF2B5EF4-FFF2-40B4-BE49-F238E27FC236}">
+              <a16:creationId xmlns:a16="http://schemas.microsoft.com/office/drawing/2014/main" id="{48B09052-50AE-B3C2-6A1C-5CFF37D94A7E}"/>
+            </a:ext>
+          </a:extLst>
+        </p:cNvPr>
         <p:cNvGrpSpPr/>
         <p:nvPr/>
       </p:nvGrpSpPr>
@@ -6480,7 +6481,13 @@
       </p:grpSpPr>
       <p:sp>
         <p:nvSpPr>
-          <p:cNvPr id="17409" name="Title 1"/>
+          <p:cNvPr id="17409" name="Title 1">
+            <a:extLst>
+              <a:ext uri="{FF2B5EF4-FFF2-40B4-BE49-F238E27FC236}">
+                <a16:creationId xmlns:a16="http://schemas.microsoft.com/office/drawing/2014/main" id="{5E03BF1A-7989-5C44-934B-D93E149184A6}"/>
+              </a:ext>
+            </a:extLst>
+          </p:cNvPr>
           <p:cNvSpPr>
             <a:spLocks noGrp="1"/>
           </p:cNvSpPr>
@@ -6488,7 +6495,12 @@
             <p:ph type="title"/>
           </p:nvPr>
         </p:nvSpPr>
-        <p:spPr/>
+        <p:spPr>
+          <a:xfrm>
+            <a:off x="609600" y="-284333"/>
+            <a:ext cx="10972800" cy="1143000"/>
+          </a:xfrm>
+        </p:spPr>
         <p:txBody>
           <a:bodyPr/>
           <a:lstStyle/>
@@ -6500,184 +6512,20 @@
                 <a:ea typeface="ＭＳ Ｐゴシック" pitchFamily="1" charset="-128"/>
                 <a:cs typeface="Times New Roman" panose="02020603050405020304" pitchFamily="18" charset="0"/>
               </a:rPr>
-              <a:t>FEASIBILITY AND VIABILITY</a:t>
-            </a:r>
-          </a:p>
-        </p:txBody>
-      </p:sp>
-      <p:sp>
-        <p:nvSpPr>
-          <p:cNvPr id="17410" name="TextBox 8"/>
-          <p:cNvSpPr txBox="1">
-            <a:spLocks noChangeArrowheads="1"/>
-          </p:cNvSpPr>
-          <p:nvPr/>
-        </p:nvSpPr>
-        <p:spPr bwMode="auto">
-          <a:xfrm>
-            <a:off x="609600" y="2533653"/>
-            <a:ext cx="9385300" cy="1384995"/>
-          </a:xfrm>
-          <a:prstGeom prst="rect">
-            <a:avLst/>
-          </a:prstGeom>
-          <a:noFill/>
-          <a:ln w="9525">
-            <a:noFill/>
-            <a:miter lim="800000"/>
-            <a:headEnd/>
-            <a:tailEnd/>
-          </a:ln>
-        </p:spPr>
-        <p:txBody>
-          <a:bodyPr wrap="square">
-            <a:spAutoFit/>
-          </a:bodyPr>
-          <a:lstStyle/>
-          <a:p>
-            <a:pPr marL="342900" marR="0" lvl="0" indent="-342900" algn="just" defTabSz="457200" rtl="0" eaLnBrk="1" fontAlgn="base" latinLnBrk="0" hangingPunct="1">
-              <a:lnSpc>
-                <a:spcPct val="100000"/>
-              </a:lnSpc>
-              <a:spcBef>
-                <a:spcPct val="0"/>
-              </a:spcBef>
-              <a:spcAft>
-                <a:spcPct val="0"/>
-              </a:spcAft>
-              <a:buClrTx/>
-              <a:buSzTx/>
-              <a:buFont typeface="Arial" panose="020B0604020202020204" pitchFamily="34" charset="0"/>
-              <a:buChar char="•"/>
-              <a:tabLst/>
-              <a:defRPr/>
-            </a:pPr>
-            <a:r>
-              <a:rPr lang="en-US" sz="2800" dirty="0">
-                <a:solidFill>
-                  <a:prstClr val="black"/>
-                </a:solidFill>
-                <a:latin typeface="Arial" pitchFamily="34" charset="0"/>
-                <a:cs typeface="Arial" pitchFamily="34" charset="0"/>
-              </a:rPr>
-              <a:t>Analysis of the feasibility of the idea</a:t>
-            </a:r>
-            <a:endParaRPr kumimoji="0" lang="en-US" sz="2800" b="0" i="0" u="none" strike="noStrike" kern="1200" cap="none" spc="0" normalizeH="0" baseline="0" noProof="0" dirty="0">
-              <a:ln>
-                <a:noFill/>
-              </a:ln>
-              <a:solidFill>
-                <a:prstClr val="black"/>
-              </a:solidFill>
-              <a:effectLst/>
-              <a:uLnTx/>
-              <a:uFillTx/>
-              <a:latin typeface="Arial" pitchFamily="34" charset="0"/>
-              <a:ea typeface="ＭＳ Ｐゴシック" pitchFamily="1" charset="-128"/>
-              <a:cs typeface="Arial" pitchFamily="34" charset="0"/>
-            </a:endParaRPr>
-          </a:p>
-          <a:p>
-            <a:pPr marL="342900" marR="0" lvl="0" indent="-342900" algn="just" defTabSz="457200" rtl="0" eaLnBrk="1" fontAlgn="base" latinLnBrk="0" hangingPunct="1">
-              <a:lnSpc>
-                <a:spcPct val="100000"/>
-              </a:lnSpc>
-              <a:spcBef>
-                <a:spcPct val="0"/>
-              </a:spcBef>
-              <a:spcAft>
-                <a:spcPct val="0"/>
-              </a:spcAft>
-              <a:buClrTx/>
-              <a:buSzTx/>
-              <a:buFont typeface="Arial" panose="020B0604020202020204" pitchFamily="34" charset="0"/>
-              <a:buChar char="•"/>
-              <a:tabLst/>
-              <a:defRPr/>
-            </a:pPr>
-            <a:r>
-              <a:rPr lang="en-US" sz="2800" dirty="0">
-                <a:solidFill>
-                  <a:prstClr val="black"/>
-                </a:solidFill>
-                <a:latin typeface="Arial" pitchFamily="34" charset="0"/>
-                <a:cs typeface="Arial" pitchFamily="34" charset="0"/>
-              </a:rPr>
-              <a:t>Potential challenges and risks</a:t>
-            </a:r>
-          </a:p>
-          <a:p>
-            <a:pPr marL="342900" marR="0" lvl="0" indent="-342900" algn="just" defTabSz="457200" rtl="0" eaLnBrk="1" fontAlgn="base" latinLnBrk="0" hangingPunct="1">
-              <a:lnSpc>
-                <a:spcPct val="100000"/>
-              </a:lnSpc>
-              <a:spcBef>
-                <a:spcPct val="0"/>
-              </a:spcBef>
-              <a:spcAft>
-                <a:spcPct val="0"/>
-              </a:spcAft>
-              <a:buClrTx/>
-              <a:buSzTx/>
-              <a:buFont typeface="Arial" panose="020B0604020202020204" pitchFamily="34" charset="0"/>
-              <a:buChar char="•"/>
-              <a:tabLst/>
-              <a:defRPr/>
-            </a:pPr>
-            <a:r>
-              <a:rPr kumimoji="0" lang="en-US" sz="2800" b="0" i="0" u="none" strike="noStrike" kern="1200" cap="none" spc="0" normalizeH="0" baseline="0" noProof="0" dirty="0">
-                <a:ln>
-                  <a:noFill/>
-                </a:ln>
-                <a:solidFill>
-                  <a:prstClr val="black"/>
-                </a:solidFill>
-                <a:effectLst/>
-                <a:uLnTx/>
-                <a:uFillTx/>
-                <a:latin typeface="Arial" pitchFamily="34" charset="0"/>
-                <a:ea typeface="ＭＳ Ｐゴシック" pitchFamily="1" charset="-128"/>
-                <a:cs typeface="Arial" pitchFamily="34" charset="0"/>
-              </a:rPr>
-              <a:t>Strategies</a:t>
-            </a:r>
-            <a:r>
-              <a:rPr kumimoji="0" lang="en-US" sz="2800" b="0" i="0" u="none" strike="noStrike" kern="1200" cap="none" spc="0" normalizeH="0" noProof="0" dirty="0">
-                <a:ln>
-                  <a:noFill/>
-                </a:ln>
-                <a:solidFill>
-                  <a:prstClr val="black"/>
-                </a:solidFill>
-                <a:effectLst/>
-                <a:uLnTx/>
-                <a:uFillTx/>
-                <a:latin typeface="Arial" pitchFamily="34" charset="0"/>
-                <a:ea typeface="ＭＳ Ｐゴシック" pitchFamily="1" charset="-128"/>
-                <a:cs typeface="Arial" pitchFamily="34" charset="0"/>
-              </a:rPr>
-              <a:t> for overcoming these challenges</a:t>
-            </a:r>
-            <a:endParaRPr kumimoji="0" lang="en-US" sz="2800" b="0" i="0" u="none" strike="noStrike" kern="1200" cap="none" spc="0" normalizeH="0" baseline="0" noProof="0" dirty="0">
-              <a:ln>
-                <a:noFill/>
-              </a:ln>
-              <a:solidFill>
-                <a:prstClr val="black"/>
-              </a:solidFill>
-              <a:effectLst/>
-              <a:uLnTx/>
-              <a:uFillTx/>
-              <a:latin typeface="Arial" pitchFamily="34" charset="0"/>
-              <a:ea typeface="ＭＳ Ｐゴシック" pitchFamily="1" charset="-128"/>
-              <a:cs typeface="Arial" pitchFamily="34" charset="0"/>
-            </a:endParaRPr>
-          </a:p>
-        </p:txBody>
-      </p:sp>
-      <p:sp>
-        <p:nvSpPr>
-          <p:cNvPr id="6" name="Slide Number Placeholder 5"/>
+              <a:t>ARTIFACTS</a:t>
+            </a:r>
+          </a:p>
+        </p:txBody>
+      </p:sp>
+      <p:sp>
+        <p:nvSpPr>
+          <p:cNvPr id="6" name="Slide Number Placeholder 5">
+            <a:extLst>
+              <a:ext uri="{FF2B5EF4-FFF2-40B4-BE49-F238E27FC236}">
+                <a16:creationId xmlns:a16="http://schemas.microsoft.com/office/drawing/2014/main" id="{84B14AAA-63FC-5F17-FE74-5405495A1CD3}"/>
+              </a:ext>
+            </a:extLst>
+          </p:cNvPr>
           <p:cNvSpPr>
             <a:spLocks noGrp="1"/>
           </p:cNvSpPr>
@@ -6760,7 +6608,13 @@
       </p:sp>
       <p:sp>
         <p:nvSpPr>
-          <p:cNvPr id="7" name="Footer Placeholder 6"/>
+          <p:cNvPr id="7" name="Footer Placeholder 6">
+            <a:extLst>
+              <a:ext uri="{FF2B5EF4-FFF2-40B4-BE49-F238E27FC236}">
+                <a16:creationId xmlns:a16="http://schemas.microsoft.com/office/drawing/2014/main" id="{34C6332B-BBD9-799D-50C5-6A19BC85E43E}"/>
+              </a:ext>
+            </a:extLst>
+          </p:cNvPr>
           <p:cNvSpPr>
             <a:spLocks noGrp="1"/>
           </p:cNvSpPr>
@@ -6829,10 +6683,255 @@
           </a:p>
         </p:txBody>
       </p:sp>
+      <p:pic>
+        <p:nvPicPr>
+          <p:cNvPr id="3" name="Picture 2">
+            <a:extLst>
+              <a:ext uri="{FF2B5EF4-FFF2-40B4-BE49-F238E27FC236}">
+                <a16:creationId xmlns:a16="http://schemas.microsoft.com/office/drawing/2014/main" id="{C004D6C7-6F2C-11AB-4FED-8E72F5F67287}"/>
+              </a:ext>
+            </a:extLst>
+          </p:cNvPr>
+          <p:cNvPicPr>
+            <a:picLocks noChangeAspect="1"/>
+          </p:cNvPicPr>
+          <p:nvPr/>
+        </p:nvPicPr>
+        <p:blipFill>
+          <a:blip r:embed="rId3"/>
+          <a:stretch>
+            <a:fillRect/>
+          </a:stretch>
+        </p:blipFill>
+        <p:spPr>
+          <a:xfrm>
+            <a:off x="4053841" y="1129171"/>
+            <a:ext cx="3979121" cy="2885440"/>
+          </a:xfrm>
+          <a:prstGeom prst="rect">
+            <a:avLst/>
+          </a:prstGeom>
+        </p:spPr>
+      </p:pic>
+      <p:pic>
+        <p:nvPicPr>
+          <p:cNvPr id="5" name="Picture 4">
+            <a:extLst>
+              <a:ext uri="{FF2B5EF4-FFF2-40B4-BE49-F238E27FC236}">
+                <a16:creationId xmlns:a16="http://schemas.microsoft.com/office/drawing/2014/main" id="{5D82A8C4-BECF-48F1-D29B-F70250A8D5AB}"/>
+              </a:ext>
+            </a:extLst>
+          </p:cNvPr>
+          <p:cNvPicPr>
+            <a:picLocks noChangeAspect="1"/>
+          </p:cNvPicPr>
+          <p:nvPr/>
+        </p:nvPicPr>
+        <p:blipFill>
+          <a:blip r:embed="rId4"/>
+          <a:stretch>
+            <a:fillRect/>
+          </a:stretch>
+        </p:blipFill>
+        <p:spPr>
+          <a:xfrm>
+            <a:off x="8032962" y="1097281"/>
+            <a:ext cx="4159038" cy="2885440"/>
+          </a:xfrm>
+          <a:prstGeom prst="rect">
+            <a:avLst/>
+          </a:prstGeom>
+        </p:spPr>
+      </p:pic>
+      <p:pic>
+        <p:nvPicPr>
+          <p:cNvPr id="9" name="Picture 8">
+            <a:extLst>
+              <a:ext uri="{FF2B5EF4-FFF2-40B4-BE49-F238E27FC236}">
+                <a16:creationId xmlns:a16="http://schemas.microsoft.com/office/drawing/2014/main" id="{0E754748-2E81-9143-9C3C-E0E49CFCDC2E}"/>
+              </a:ext>
+            </a:extLst>
+          </p:cNvPr>
+          <p:cNvPicPr>
+            <a:picLocks noChangeAspect="1"/>
+          </p:cNvPicPr>
+          <p:nvPr/>
+        </p:nvPicPr>
+        <p:blipFill>
+          <a:blip r:embed="rId5"/>
+          <a:stretch>
+            <a:fillRect/>
+          </a:stretch>
+        </p:blipFill>
+        <p:spPr>
+          <a:xfrm>
+            <a:off x="-8360" y="3982721"/>
+            <a:ext cx="5950162" cy="2885440"/>
+          </a:xfrm>
+          <a:prstGeom prst="rect">
+            <a:avLst/>
+          </a:prstGeom>
+        </p:spPr>
+      </p:pic>
+      <p:pic>
+        <p:nvPicPr>
+          <p:cNvPr id="11" name="Picture 10">
+            <a:extLst>
+              <a:ext uri="{FF2B5EF4-FFF2-40B4-BE49-F238E27FC236}">
+                <a16:creationId xmlns:a16="http://schemas.microsoft.com/office/drawing/2014/main" id="{39C005E4-8552-8BC8-7AF2-B953840F7F41}"/>
+              </a:ext>
+            </a:extLst>
+          </p:cNvPr>
+          <p:cNvPicPr>
+            <a:picLocks noChangeAspect="1"/>
+          </p:cNvPicPr>
+          <p:nvPr/>
+        </p:nvPicPr>
+        <p:blipFill>
+          <a:blip r:embed="rId6"/>
+          <a:stretch>
+            <a:fillRect/>
+          </a:stretch>
+        </p:blipFill>
+        <p:spPr>
+          <a:xfrm>
+            <a:off x="5941802" y="3979863"/>
+            <a:ext cx="6258560" cy="2888298"/>
+          </a:xfrm>
+          <a:prstGeom prst="rect">
+            <a:avLst/>
+          </a:prstGeom>
+        </p:spPr>
+      </p:pic>
+      <p:pic>
+        <p:nvPicPr>
+          <p:cNvPr id="13" name="Picture 12">
+            <a:extLst>
+              <a:ext uri="{FF2B5EF4-FFF2-40B4-BE49-F238E27FC236}">
+                <a16:creationId xmlns:a16="http://schemas.microsoft.com/office/drawing/2014/main" id="{873EC41F-C1D1-433C-F357-C010F650B575}"/>
+              </a:ext>
+            </a:extLst>
+          </p:cNvPr>
+          <p:cNvPicPr>
+            <a:picLocks noChangeAspect="1"/>
+          </p:cNvPicPr>
+          <p:nvPr/>
+        </p:nvPicPr>
+        <p:blipFill>
+          <a:blip r:embed="rId7"/>
+          <a:stretch>
+            <a:fillRect/>
+          </a:stretch>
+        </p:blipFill>
+        <p:spPr>
+          <a:xfrm>
+            <a:off x="1" y="1161062"/>
+            <a:ext cx="4045478" cy="2821659"/>
+          </a:xfrm>
+          <a:prstGeom prst="rect">
+            <a:avLst/>
+          </a:prstGeom>
+        </p:spPr>
+      </p:pic>
+      <p:sp>
+        <p:nvSpPr>
+          <p:cNvPr id="14" name="TextBox 13">
+            <a:extLst>
+              <a:ext uri="{FF2B5EF4-FFF2-40B4-BE49-F238E27FC236}">
+                <a16:creationId xmlns:a16="http://schemas.microsoft.com/office/drawing/2014/main" id="{2CB35C82-3F00-388A-B916-04516FA17B24}"/>
+              </a:ext>
+            </a:extLst>
+          </p:cNvPr>
+          <p:cNvSpPr txBox="1"/>
+          <p:nvPr/>
+        </p:nvSpPr>
+        <p:spPr>
+          <a:xfrm>
+            <a:off x="84847" y="674001"/>
+            <a:ext cx="5958554" cy="369332"/>
+          </a:xfrm>
+          <a:prstGeom prst="rect">
+            <a:avLst/>
+          </a:prstGeom>
+          <a:noFill/>
+        </p:spPr>
+        <p:txBody>
+          <a:bodyPr wrap="none" rtlCol="0">
+            <a:spAutoFit/>
+          </a:bodyPr>
+          <a:lstStyle/>
+          <a:p>
+            <a:r>
+              <a:rPr lang="en-IN" dirty="0"/>
+              <a:t>GITHUB LINK: </a:t>
+            </a:r>
+            <a:r>
+              <a:rPr lang="en-IN" dirty="0">
+                <a:hlinkClick r:id="rId8"/>
+              </a:rPr>
+              <a:t>https://github.com/APEXPRE123207/SentinelAI</a:t>
+            </a:r>
+            <a:endParaRPr lang="en-IN" dirty="0"/>
+          </a:p>
+        </p:txBody>
+      </p:sp>
+      <p:sp>
+        <p:nvSpPr>
+          <p:cNvPr id="2" name="TextBox 1">
+            <a:extLst>
+              <a:ext uri="{FF2B5EF4-FFF2-40B4-BE49-F238E27FC236}">
+                <a16:creationId xmlns:a16="http://schemas.microsoft.com/office/drawing/2014/main" id="{038D6DBD-1E79-2D47-F416-1278CF45AA78}"/>
+              </a:ext>
+            </a:extLst>
+          </p:cNvPr>
+          <p:cNvSpPr txBox="1"/>
+          <p:nvPr/>
+        </p:nvSpPr>
+        <p:spPr>
+          <a:xfrm>
+            <a:off x="7049729" y="674001"/>
+            <a:ext cx="4739147" cy="369332"/>
+          </a:xfrm>
+          <a:prstGeom prst="rect">
+            <a:avLst/>
+          </a:prstGeom>
+          <a:noFill/>
+        </p:spPr>
+        <p:txBody>
+          <a:bodyPr wrap="square" rtlCol="0">
+            <a:spAutoFit/>
+          </a:bodyPr>
+          <a:lstStyle/>
+          <a:p>
+            <a:r>
+              <a:rPr lang="en-IN" dirty="0"/>
+              <a:t>VIDEO LINK: </a:t>
+            </a:r>
+            <a:r>
+              <a:rPr lang="en-IN" dirty="0">
+                <a:hlinkClick r:id="rId9"/>
+              </a:rPr>
+              <a:t>Google drive</a:t>
+            </a:r>
+            <a:r>
+              <a:rPr lang="en-IN" dirty="0"/>
+              <a:t> (Video also in </a:t>
+            </a:r>
+            <a:r>
+              <a:rPr lang="en-IN" dirty="0" err="1"/>
+              <a:t>github</a:t>
+            </a:r>
+            <a:r>
+              <a:rPr lang="en-IN" dirty="0"/>
+              <a:t>)</a:t>
+            </a:r>
+          </a:p>
+        </p:txBody>
+      </p:sp>
     </p:spTree>
     <p:extLst>
       <p:ext uri="{BB962C8B-B14F-4D97-AF65-F5344CB8AC3E}">
-        <p14:creationId xmlns:p14="http://schemas.microsoft.com/office/powerpoint/2010/main" val="3753387913"/>
+        <p14:creationId xmlns:p14="http://schemas.microsoft.com/office/powerpoint/2010/main" val="973447886"/>
       </p:ext>
     </p:extLst>
   </p:cSld>
@@ -6847,13 +6946,7 @@
   <p:cSld>
     <p:spTree>
       <p:nvGrpSpPr>
-        <p:cNvPr id="1" name="">
-          <a:extLst>
-            <a:ext uri="{FF2B5EF4-FFF2-40B4-BE49-F238E27FC236}">
-              <a16:creationId xmlns:a16="http://schemas.microsoft.com/office/drawing/2014/main" id="{48B09052-50AE-B3C2-6A1C-5CFF37D94A7E}"/>
-            </a:ext>
-          </a:extLst>
-        </p:cNvPr>
+        <p:cNvPr id="1" name=""/>
         <p:cNvGrpSpPr/>
         <p:nvPr/>
       </p:nvGrpSpPr>
@@ -6867,13 +6960,7 @@
       </p:grpSpPr>
       <p:sp>
         <p:nvSpPr>
-          <p:cNvPr id="17409" name="Title 1">
-            <a:extLst>
-              <a:ext uri="{FF2B5EF4-FFF2-40B4-BE49-F238E27FC236}">
-                <a16:creationId xmlns:a16="http://schemas.microsoft.com/office/drawing/2014/main" id="{5E03BF1A-7989-5C44-934B-D93E149184A6}"/>
-              </a:ext>
-            </a:extLst>
-          </p:cNvPr>
+          <p:cNvPr id="17409" name="Title 1"/>
           <p:cNvSpPr>
             <a:spLocks noGrp="1"/>
           </p:cNvSpPr>
@@ -6893,20 +6980,14 @@
                 <a:ea typeface="ＭＳ Ｐゴシック" pitchFamily="1" charset="-128"/>
                 <a:cs typeface="Times New Roman" panose="02020603050405020304" pitchFamily="18" charset="0"/>
               </a:rPr>
-              <a:t>ARTIFACTS</a:t>
-            </a:r>
-          </a:p>
-        </p:txBody>
-      </p:sp>
-      <p:sp>
-        <p:nvSpPr>
-          <p:cNvPr id="17410" name="TextBox 8">
-            <a:extLst>
-              <a:ext uri="{FF2B5EF4-FFF2-40B4-BE49-F238E27FC236}">
-                <a16:creationId xmlns:a16="http://schemas.microsoft.com/office/drawing/2014/main" id="{DD0C6F84-D6ED-416D-7179-055149D83FA6}"/>
-              </a:ext>
-            </a:extLst>
-          </p:cNvPr>
+              <a:t>RESEARCH  AND REFERENCES</a:t>
+            </a:r>
+          </a:p>
+        </p:txBody>
+      </p:sp>
+      <p:sp>
+        <p:nvSpPr>
+          <p:cNvPr id="17410" name="TextBox 8"/>
           <p:cNvSpPr txBox="1">
             <a:spLocks noChangeArrowheads="1"/>
           </p:cNvSpPr>
@@ -6914,8 +6995,8 @@
         </p:nvSpPr>
         <p:spPr bwMode="auto">
           <a:xfrm>
-            <a:off x="609600" y="2533653"/>
-            <a:ext cx="9385300" cy="2246769"/>
+            <a:off x="497840" y="1433823"/>
+            <a:ext cx="11236960" cy="3416320"/>
           </a:xfrm>
           <a:prstGeom prst="rect">
             <a:avLst/>
@@ -6934,121 +7015,144 @@
           </a:bodyPr>
           <a:lstStyle/>
           <a:p>
-            <a:pPr marL="342900" marR="0" lvl="0" indent="-342900" algn="just" defTabSz="457200" rtl="0" eaLnBrk="1" fontAlgn="base" latinLnBrk="0" hangingPunct="1">
-              <a:lnSpc>
-                <a:spcPct val="100000"/>
-              </a:lnSpc>
-              <a:spcBef>
-                <a:spcPct val="0"/>
-              </a:spcBef>
-              <a:spcAft>
-                <a:spcPct val="0"/>
-              </a:spcAft>
-              <a:buClrTx/>
-              <a:buSzTx/>
-              <a:buFont typeface="Arial" panose="020B0604020202020204" pitchFamily="34" charset="0"/>
-              <a:buChar char="•"/>
-              <a:tabLst/>
-              <a:defRPr/>
-            </a:pPr>
-            <a:r>
-              <a:rPr lang="en-US" sz="2800" dirty="0">
-                <a:solidFill>
-                  <a:prstClr val="black"/>
-                </a:solidFill>
-                <a:latin typeface="Arial" pitchFamily="34" charset="0"/>
-                <a:cs typeface="Arial" pitchFamily="34" charset="0"/>
-              </a:rPr>
-              <a:t>Relevant artifacts, such as :</a:t>
-            </a:r>
-          </a:p>
-          <a:p>
-            <a:pPr marL="800100" lvl="1" indent="-342900" algn="just">
+            <a:pPr marL="342900" lvl="0" indent="-342900" algn="just">
               <a:buFont typeface="Arial" panose="020B0604020202020204" pitchFamily="34" charset="0"/>
               <a:buChar char="•"/>
               <a:defRPr/>
             </a:pPr>
             <a:r>
-              <a:rPr lang="en-US" sz="2800" dirty="0">
+              <a:rPr lang="en-US" dirty="0">
                 <a:solidFill>
                   <a:prstClr val="black"/>
                 </a:solidFill>
-                <a:latin typeface="Arial" pitchFamily="34" charset="0"/>
+                <a:latin typeface="+mn-lt"/>
                 <a:cs typeface="Arial" pitchFamily="34" charset="0"/>
               </a:rPr>
-              <a:t>Copy of the Code Embedded</a:t>
-            </a:r>
-          </a:p>
-          <a:p>
-            <a:pPr marL="800100" lvl="1" indent="-342900" algn="just">
+              <a:t>Richard J. de Dear, Gail S. Brager, Thermal comfort in naturally ventilated buildings: revisions to ASHRAE Standard 55, Energy and Buildings, Volume 34, Issue 6, 2002, Pages 549-561, ISSN 0378-7788, </a:t>
+            </a:r>
+            <a:r>
+              <a:rPr lang="en-US" dirty="0">
+                <a:solidFill>
+                  <a:prstClr val="black"/>
+                </a:solidFill>
+                <a:latin typeface="+mn-lt"/>
+                <a:cs typeface="Arial" pitchFamily="34" charset="0"/>
+                <a:hlinkClick r:id="rId3"/>
+              </a:rPr>
+              <a:t>https://doi.org/10.1016/S0378-7788(02)00005-1</a:t>
+            </a:r>
+            <a:r>
+              <a:rPr lang="en-US" dirty="0">
+                <a:solidFill>
+                  <a:prstClr val="black"/>
+                </a:solidFill>
+                <a:latin typeface="+mn-lt"/>
+                <a:cs typeface="Arial" pitchFamily="34" charset="0"/>
+              </a:rPr>
+              <a:t>. (</a:t>
+            </a:r>
+            <a:r>
+              <a:rPr lang="en-US" dirty="0">
+                <a:solidFill>
+                  <a:prstClr val="black"/>
+                </a:solidFill>
+                <a:latin typeface="+mn-lt"/>
+                <a:cs typeface="Arial" pitchFamily="34" charset="0"/>
+                <a:hlinkClick r:id="rId4"/>
+              </a:rPr>
+              <a:t>https://www.sciencedirect.com/science/article/pii/S0378778802000051</a:t>
+            </a:r>
+            <a:r>
+              <a:rPr lang="en-US" dirty="0">
+                <a:solidFill>
+                  <a:prstClr val="black"/>
+                </a:solidFill>
+                <a:latin typeface="+mn-lt"/>
+                <a:cs typeface="Arial" pitchFamily="34" charset="0"/>
+              </a:rPr>
+              <a:t>)</a:t>
+            </a:r>
+          </a:p>
+          <a:p>
+            <a:pPr marL="342900" lvl="0" indent="-342900" algn="just">
               <a:buFont typeface="Arial" panose="020B0604020202020204" pitchFamily="34" charset="0"/>
               <a:buChar char="•"/>
               <a:defRPr/>
             </a:pPr>
-            <a:r>
-              <a:rPr kumimoji="0" lang="en-US" sz="2800" b="0" i="0" u="none" strike="noStrike" kern="1200" cap="none" spc="0" normalizeH="0" baseline="0" noProof="0" dirty="0">
-                <a:ln>
-                  <a:noFill/>
-                </a:ln>
-                <a:solidFill>
-                  <a:prstClr val="black"/>
-                </a:solidFill>
-                <a:effectLst/>
-                <a:uLnTx/>
-                <a:uFillTx/>
-                <a:latin typeface="Arial" pitchFamily="34" charset="0"/>
-                <a:ea typeface="ＭＳ Ｐゴシック" pitchFamily="1" charset="-128"/>
-                <a:cs typeface="Arial" pitchFamily="34" charset="0"/>
+            <a:endParaRPr lang="en-US" dirty="0">
+              <a:solidFill>
+                <a:prstClr val="black"/>
+              </a:solidFill>
+              <a:latin typeface="Arial" pitchFamily="34" charset="0"/>
+              <a:cs typeface="Arial" pitchFamily="34" charset="0"/>
+            </a:endParaRPr>
+          </a:p>
+          <a:p>
+            <a:pPr marL="285750" indent="-285750">
+              <a:buFont typeface="Arial" panose="020B0604020202020204" pitchFamily="34" charset="0"/>
+              <a:buChar char="•"/>
+            </a:pPr>
+            <a:r>
+              <a:rPr lang="en-IN" b="1" dirty="0"/>
+              <a:t>ANSI/ASHRAE Standard 55-2023</a:t>
+            </a:r>
+            <a:br>
+              <a:rPr lang="en-IN" dirty="0"/>
+            </a:br>
+            <a:r>
+              <a:rPr lang="en-IN" i="1" dirty="0"/>
+              <a:t>Thermal Environmental Conditions for Human Occupancy. </a:t>
+            </a:r>
+            <a:r>
+              <a:rPr lang="en-IN" dirty="0">
+                <a:hlinkClick r:id="rId5"/>
               </a:rPr>
-              <a:t>Snaps of the </a:t>
-            </a:r>
-            <a:r>
-              <a:rPr lang="en-US" sz="2800" dirty="0">
-                <a:solidFill>
-                  <a:prstClr val="black"/>
-                </a:solidFill>
-                <a:latin typeface="Arial" pitchFamily="34" charset="0"/>
-                <a:cs typeface="Arial" pitchFamily="34" charset="0"/>
+              <a:t>(https://www.ashrae.org/technical-resources/bookstore/standard-55-thermal-environmental-conditions-for-human-occupancy)</a:t>
+            </a:r>
+            <a:endParaRPr lang="en-IN" dirty="0"/>
+          </a:p>
+          <a:p>
+            <a:pPr marL="285750" indent="-285750">
+              <a:buFont typeface="Arial" panose="020B0604020202020204" pitchFamily="34" charset="0"/>
+              <a:buChar char="•"/>
+            </a:pPr>
+            <a:endParaRPr lang="en-IN" dirty="0"/>
+          </a:p>
+          <a:p>
+            <a:pPr marL="285750" indent="-285750">
+              <a:buFont typeface="Arial" panose="020B0604020202020204" pitchFamily="34" charset="0"/>
+              <a:buChar char="•"/>
+            </a:pPr>
+            <a:r>
+              <a:rPr lang="en-IN" b="1" dirty="0"/>
+              <a:t>U.S. Department of Energy – </a:t>
+            </a:r>
+            <a:r>
+              <a:rPr lang="en-IN" b="1" dirty="0" err="1"/>
+              <a:t>EnergyPlus</a:t>
+            </a:r>
+            <a:r>
+              <a:rPr lang="en-IN" b="1" dirty="0"/>
+              <a:t> Documentation</a:t>
+            </a:r>
+            <a:br>
+              <a:rPr lang="en-IN" dirty="0"/>
+            </a:br>
+            <a:r>
+              <a:rPr lang="en-IN" dirty="0">
+                <a:hlinkClick r:id="rId6"/>
               </a:rPr>
-              <a:t>solution proposal</a:t>
-            </a:r>
-          </a:p>
-          <a:p>
-            <a:pPr marL="800100" lvl="1" indent="-342900" algn="just">
+              <a:t>https://energyplus.net/documentation</a:t>
+            </a:r>
+            <a:endParaRPr lang="en-IN" dirty="0"/>
+          </a:p>
+          <a:p>
+            <a:pPr marL="342900" lvl="0" indent="-342900" algn="just">
               <a:buFont typeface="Arial" panose="020B0604020202020204" pitchFamily="34" charset="0"/>
               <a:buChar char="•"/>
               <a:defRPr/>
             </a:pPr>
-            <a:r>
-              <a:rPr lang="en-US" sz="2800" dirty="0">
-                <a:solidFill>
-                  <a:prstClr val="black"/>
-                </a:solidFill>
-                <a:latin typeface="Arial" pitchFamily="34" charset="0"/>
-                <a:cs typeface="Arial" pitchFamily="34" charset="0"/>
-              </a:rPr>
-              <a:t>Dashboard snaps</a:t>
-            </a:r>
-          </a:p>
-          <a:p>
-            <a:pPr marL="342900" marR="0" lvl="0" indent="-342900" algn="just" defTabSz="457200" rtl="0" eaLnBrk="1" fontAlgn="base" latinLnBrk="0" hangingPunct="1">
-              <a:lnSpc>
-                <a:spcPct val="100000"/>
-              </a:lnSpc>
-              <a:spcBef>
-                <a:spcPct val="0"/>
-              </a:spcBef>
-              <a:spcAft>
-                <a:spcPct val="0"/>
-              </a:spcAft>
-              <a:buClrTx/>
-              <a:buSzTx/>
-              <a:buFont typeface="Arial" panose="020B0604020202020204" pitchFamily="34" charset="0"/>
-              <a:buChar char="•"/>
-              <a:tabLst/>
-              <a:defRPr/>
-            </a:pPr>
-            <a:endParaRPr kumimoji="0" lang="en-US" sz="2800" b="0" i="0" u="none" strike="noStrike" kern="1200" cap="none" spc="0" normalizeH="0" baseline="0" noProof="0" dirty="0">
+            <a:endParaRPr kumimoji="0" lang="en-US" b="0" i="0" u="none" strike="noStrike" kern="1200" cap="none" spc="0" normalizeH="0" baseline="0" noProof="0" dirty="0">
               <a:ln>
                 <a:noFill/>
               </a:ln>
@@ -7067,13 +7171,7 @@
       </p:sp>
       <p:sp>
         <p:nvSpPr>
-          <p:cNvPr id="6" name="Slide Number Placeholder 5">
-            <a:extLst>
-              <a:ext uri="{FF2B5EF4-FFF2-40B4-BE49-F238E27FC236}">
-                <a16:creationId xmlns:a16="http://schemas.microsoft.com/office/drawing/2014/main" id="{84B14AAA-63FC-5F17-FE74-5405495A1CD3}"/>
-              </a:ext>
-            </a:extLst>
-          </p:cNvPr>
+          <p:cNvPr id="6" name="Slide Number Placeholder 5"/>
           <p:cNvSpPr>
             <a:spLocks noGrp="1"/>
           </p:cNvSpPr>
@@ -7136,297 +7234,6 @@
                 <a:defRPr/>
               </a:pPr>
               <a:t>6</a:t>
-            </a:fld>
-            <a:endParaRPr kumimoji="0" lang="en-US" sz="1200" b="1" i="0" u="none" strike="noStrike" kern="1200" cap="none" spc="0" normalizeH="0" baseline="0" noProof="0" dirty="0">
-              <a:ln>
-                <a:noFill/>
-              </a:ln>
-              <a:solidFill>
-                <a:prstClr val="white"/>
-              </a:solidFill>
-              <a:effectLst/>
-              <a:uLnTx/>
-              <a:uFillTx/>
-              <a:latin typeface="TradeGothic" pitchFamily="1" charset="0"/>
-              <a:ea typeface="ＭＳ Ｐゴシック" pitchFamily="1" charset="-128"/>
-              <a:cs typeface="+mn-cs"/>
-            </a:endParaRPr>
-          </a:p>
-        </p:txBody>
-      </p:sp>
-      <p:sp>
-        <p:nvSpPr>
-          <p:cNvPr id="7" name="Footer Placeholder 6">
-            <a:extLst>
-              <a:ext uri="{FF2B5EF4-FFF2-40B4-BE49-F238E27FC236}">
-                <a16:creationId xmlns:a16="http://schemas.microsoft.com/office/drawing/2014/main" id="{34C6332B-BBD9-799D-50C5-6A19BC85E43E}"/>
-              </a:ext>
-            </a:extLst>
-          </p:cNvPr>
-          <p:cNvSpPr>
-            <a:spLocks noGrp="1"/>
-          </p:cNvSpPr>
-          <p:nvPr>
-            <p:ph type="ftr" sz="quarter" idx="11"/>
-          </p:nvPr>
-        </p:nvSpPr>
-        <p:spPr>
-          <a:xfrm>
-            <a:off x="4648200" y="6356353"/>
-            <a:ext cx="3204000" cy="365125"/>
-          </a:xfrm>
-        </p:spPr>
-        <p:txBody>
-          <a:bodyPr/>
-          <a:lstStyle/>
-          <a:p>
-            <a:pPr marL="0" marR="0" lvl="0" indent="0" algn="ctr" defTabSz="457200" rtl="0" eaLnBrk="1" fontAlgn="auto" latinLnBrk="0" hangingPunct="1">
-              <a:lnSpc>
-                <a:spcPct val="100000"/>
-              </a:lnSpc>
-              <a:spcBef>
-                <a:spcPts val="0"/>
-              </a:spcBef>
-              <a:spcAft>
-                <a:spcPts val="0"/>
-              </a:spcAft>
-              <a:buClrTx/>
-              <a:buSzTx/>
-              <a:buFontTx/>
-              <a:buNone/>
-              <a:tabLst/>
-              <a:defRPr/>
-            </a:pPr>
-            <a:r>
-              <a:rPr kumimoji="0" lang="en-US" sz="1200" b="0" i="0" u="none" strike="noStrike" kern="1200" cap="none" spc="0" normalizeH="0" baseline="0" noProof="0">
-                <a:ln>
-                  <a:noFill/>
-                </a:ln>
-                <a:solidFill>
-                  <a:prstClr val="white"/>
-                </a:solidFill>
-                <a:effectLst/>
-                <a:uLnTx/>
-                <a:uFillTx/>
-                <a:latin typeface="TradeGothic"/>
-                <a:ea typeface="+mn-ea"/>
-                <a:cs typeface="+mn-cs"/>
-              </a:rPr>
-              <a:t>@SIH Idea submission- Template</a:t>
-            </a:r>
-            <a:endParaRPr kumimoji="0" lang="en-US" sz="1200" b="0" i="0" u="none" strike="noStrike" kern="1200" cap="none" spc="0" normalizeH="0" baseline="0" noProof="0" dirty="0">
-              <a:ln>
-                <a:noFill/>
-              </a:ln>
-              <a:solidFill>
-                <a:prstClr val="white"/>
-              </a:solidFill>
-              <a:effectLst/>
-              <a:uLnTx/>
-              <a:uFillTx/>
-              <a:latin typeface="TradeGothic"/>
-              <a:ea typeface="+mn-ea"/>
-              <a:cs typeface="+mn-cs"/>
-            </a:endParaRPr>
-          </a:p>
-        </p:txBody>
-      </p:sp>
-    </p:spTree>
-    <p:extLst>
-      <p:ext uri="{BB962C8B-B14F-4D97-AF65-F5344CB8AC3E}">
-        <p14:creationId xmlns:p14="http://schemas.microsoft.com/office/powerpoint/2010/main" val="973447886"/>
-      </p:ext>
-    </p:extLst>
-  </p:cSld>
-  <p:clrMapOvr>
-    <a:masterClrMapping/>
-  </p:clrMapOvr>
-</p:sld>
-</file>
-
-<file path=ppt/slides/slide7.xml><?xml version="1.0" encoding="utf-8"?>
-<p:sld xmlns:a="http://schemas.openxmlformats.org/drawingml/2006/main" xmlns:r="http://schemas.openxmlformats.org/officeDocument/2006/relationships" xmlns:p="http://schemas.openxmlformats.org/presentationml/2006/main">
-  <p:cSld>
-    <p:spTree>
-      <p:nvGrpSpPr>
-        <p:cNvPr id="1" name=""/>
-        <p:cNvGrpSpPr/>
-        <p:nvPr/>
-      </p:nvGrpSpPr>
-      <p:grpSpPr>
-        <a:xfrm>
-          <a:off x="0" y="0"/>
-          <a:ext cx="0" cy="0"/>
-          <a:chOff x="0" y="0"/>
-          <a:chExt cx="0" cy="0"/>
-        </a:xfrm>
-      </p:grpSpPr>
-      <p:sp>
-        <p:nvSpPr>
-          <p:cNvPr id="17409" name="Title 1"/>
-          <p:cNvSpPr>
-            <a:spLocks noGrp="1"/>
-          </p:cNvSpPr>
-          <p:nvPr>
-            <p:ph type="title"/>
-          </p:nvPr>
-        </p:nvSpPr>
-        <p:spPr/>
-        <p:txBody>
-          <a:bodyPr/>
-          <a:lstStyle/>
-          <a:p>
-            <a:pPr eaLnBrk="1" hangingPunct="1"/>
-            <a:r>
-              <a:rPr lang="en-US" sz="3600" b="1" dirty="0">
-                <a:latin typeface="Times New Roman" panose="02020603050405020304" pitchFamily="18" charset="0"/>
-                <a:ea typeface="ＭＳ Ｐゴシック" pitchFamily="1" charset="-128"/>
-                <a:cs typeface="Times New Roman" panose="02020603050405020304" pitchFamily="18" charset="0"/>
-              </a:rPr>
-              <a:t>RESEARCH  AND REFERENCES</a:t>
-            </a:r>
-          </a:p>
-        </p:txBody>
-      </p:sp>
-      <p:sp>
-        <p:nvSpPr>
-          <p:cNvPr id="17410" name="TextBox 8"/>
-          <p:cNvSpPr txBox="1">
-            <a:spLocks noChangeArrowheads="1"/>
-          </p:cNvSpPr>
-          <p:nvPr/>
-        </p:nvSpPr>
-        <p:spPr bwMode="auto">
-          <a:xfrm>
-            <a:off x="609600" y="2795263"/>
-            <a:ext cx="9385300" cy="523220"/>
-          </a:xfrm>
-          <a:prstGeom prst="rect">
-            <a:avLst/>
-          </a:prstGeom>
-          <a:noFill/>
-          <a:ln w="9525">
-            <a:noFill/>
-            <a:miter lim="800000"/>
-            <a:headEnd/>
-            <a:tailEnd/>
-          </a:ln>
-        </p:spPr>
-        <p:txBody>
-          <a:bodyPr wrap="square">
-            <a:spAutoFit/>
-          </a:bodyPr>
-          <a:lstStyle/>
-          <a:p>
-            <a:pPr marL="342900" marR="0" lvl="0" indent="-342900" algn="just" defTabSz="457200" rtl="0" eaLnBrk="1" fontAlgn="base" latinLnBrk="0" hangingPunct="1">
-              <a:lnSpc>
-                <a:spcPct val="100000"/>
-              </a:lnSpc>
-              <a:spcBef>
-                <a:spcPct val="0"/>
-              </a:spcBef>
-              <a:spcAft>
-                <a:spcPct val="0"/>
-              </a:spcAft>
-              <a:buClrTx/>
-              <a:buSzTx/>
-              <a:buFont typeface="Arial" panose="020B0604020202020204" pitchFamily="34" charset="0"/>
-              <a:buChar char="•"/>
-              <a:tabLst/>
-              <a:defRPr/>
-            </a:pPr>
-            <a:r>
-              <a:rPr lang="en-US" sz="2800" noProof="0" dirty="0">
-                <a:solidFill>
-                  <a:prstClr val="black"/>
-                </a:solidFill>
-                <a:latin typeface="Arial" pitchFamily="34" charset="0"/>
-                <a:cs typeface="Arial" pitchFamily="34" charset="0"/>
-              </a:rPr>
-              <a:t>Details / Links of the reference and research work</a:t>
-            </a:r>
-            <a:endParaRPr kumimoji="0" lang="en-US" sz="2800" b="0" i="0" u="none" strike="noStrike" kern="1200" cap="none" spc="0" normalizeH="0" baseline="0" noProof="0" dirty="0">
-              <a:ln>
-                <a:noFill/>
-              </a:ln>
-              <a:solidFill>
-                <a:prstClr val="black"/>
-              </a:solidFill>
-              <a:effectLst/>
-              <a:uLnTx/>
-              <a:uFillTx/>
-              <a:latin typeface="Arial" pitchFamily="34" charset="0"/>
-              <a:ea typeface="ＭＳ Ｐゴシック" pitchFamily="1" charset="-128"/>
-              <a:cs typeface="Arial" pitchFamily="34" charset="0"/>
-            </a:endParaRPr>
-          </a:p>
-        </p:txBody>
-      </p:sp>
-      <p:sp>
-        <p:nvSpPr>
-          <p:cNvPr id="6" name="Slide Number Placeholder 5"/>
-          <p:cNvSpPr>
-            <a:spLocks noGrp="1"/>
-          </p:cNvSpPr>
-          <p:nvPr>
-            <p:ph type="sldNum" sz="quarter" idx="12"/>
-          </p:nvPr>
-        </p:nvSpPr>
-        <p:spPr/>
-        <p:txBody>
-          <a:bodyPr/>
-          <a:lstStyle/>
-          <a:p>
-            <a:pPr marL="0" marR="0" lvl="0" indent="0" algn="r" defTabSz="457200" rtl="0" eaLnBrk="1" fontAlgn="base" latinLnBrk="0" hangingPunct="1">
-              <a:lnSpc>
-                <a:spcPct val="100000"/>
-              </a:lnSpc>
-              <a:spcBef>
-                <a:spcPct val="0"/>
-              </a:spcBef>
-              <a:spcAft>
-                <a:spcPct val="0"/>
-              </a:spcAft>
-              <a:buClrTx/>
-              <a:buSzTx/>
-              <a:buFontTx/>
-              <a:buNone/>
-              <a:tabLst/>
-              <a:defRPr/>
-            </a:pPr>
-            <a:fld id="{677C3CE7-23F7-4828-823C-E0205DF2CF97}" type="slidenum">
-              <a:rPr kumimoji="0" lang="en-US" sz="1200" b="1" i="0" u="none" strike="noStrike" kern="1200" cap="none" spc="0" normalizeH="0" baseline="0" noProof="0">
-                <a:ln>
-                  <a:noFill/>
-                </a:ln>
-                <a:solidFill>
-                  <a:prstClr val="white"/>
-                </a:solidFill>
-                <a:effectLst/>
-                <a:uLnTx/>
-                <a:uFillTx/>
-                <a:latin typeface="TradeGothic" pitchFamily="1" charset="0"/>
-                <a:ea typeface="ＭＳ Ｐゴシック" pitchFamily="1" charset="-128"/>
-                <a:cs typeface="+mn-cs"/>
-              </a:rPr>
-              <a:pPr marL="0" marR="0" lvl="0" indent="0" algn="r" defTabSz="457200" rtl="0" eaLnBrk="1" fontAlgn="base" latinLnBrk="0" hangingPunct="1">
-                <a:lnSpc>
-                  <a:spcPct val="100000"/>
-                </a:lnSpc>
-                <a:spcBef>
-                  <a:spcPct val="0"/>
-                </a:spcBef>
-                <a:spcAft>
-                  <a:spcPct val="0"/>
-                </a:spcAft>
-                <a:buClrTx/>
-                <a:buSzTx/>
-                <a:buFontTx/>
-                <a:buNone/>
-                <a:tabLst/>
-                <a:defRPr/>
-              </a:pPr>
-              <a:t>7</a:t>
             </a:fld>
             <a:endParaRPr kumimoji="0" lang="en-US" sz="1200" b="1" i="0" u="none" strike="noStrike" kern="1200" cap="none" spc="0" normalizeH="0" baseline="0" noProof="0" dirty="0">
               <a:ln>
